--- a/pptx/Module11_DML_INSERT_UPDATE_DELETE.pptx
+++ b/pptx/Module11_DML_INSERT_UPDATE_DELETE.pptx
@@ -598,7 +598,7 @@
           <a:p>
             <a:r>
               <a:rPr lang="en-US" dirty="0"/>
-              <a:t>Faire taper le script de peuplement dans HeidiSQL. Vérifier que les FK sont respectées.</a:t>
+              <a:t>Faire taper le script dans HeidiSQL.</a:t>
             </a:r>
             <a:endParaRPr lang="en-US" dirty="0"/>
           </a:p>
@@ -686,7 +686,7 @@
           <a:p>
             <a:r>
               <a:rPr lang="en-US" dirty="0"/>
-              <a:t>RÈGLE D'OR : SELECT avant UPDATE. Toujours. Sans exception.</a:t>
+              <a:t>SELECT avant UPDATE. Toujours. Sans exception.</a:t>
             </a:r>
             <a:endParaRPr lang="en-US" dirty="0"/>
           </a:p>
@@ -774,7 +774,7 @@
           <a:p>
             <a:r>
               <a:rPr lang="en-US" dirty="0"/>
-              <a:t>Montrer le danger en live : créer une table test, INSERT 10 lignes, DELETE sans WHERE → tout disparaît.</a:t>
+              <a:t>Montrer le danger en live : creer table test, INSERT 10 lignes, DELETE sans WHERE.</a:t>
             </a:r>
             <a:endParaRPr lang="en-US" dirty="0"/>
           </a:p>
@@ -862,7 +862,7 @@
           <a:p>
             <a:r>
               <a:rPr lang="en-US" dirty="0"/>
-              <a:t>Les transactions sont essentielles pour la fiabilité. Démontrer : BEGIN → modifications → ROLLBACK → vérifier que rien n'a changé.</a:t>
+              <a:t>Demo : BEGIN → modifications → ROLLBACK → verifier que rien n'a change.</a:t>
             </a:r>
             <a:endParaRPr lang="en-US" dirty="0"/>
           </a:p>
@@ -950,7 +950,7 @@
           <a:p>
             <a:r>
               <a:rPr lang="en-US" dirty="0"/>
-              <a:t>Répéter la distinction atomicité ACID vs 1NF. C'est une question classique d'examen.</a:t>
+              <a:t>Repeter : atomicite ACID ≠ 1NF. Question classique d'examen.</a:t>
             </a:r>
             <a:endParaRPr lang="en-US" dirty="0"/>
           </a:p>
@@ -1038,7 +1038,7 @@
           <a:p>
             <a:r>
               <a:rPr lang="en-US" dirty="0"/>
-              <a:t>Exercice pratique complet. Les étudiants manipulent les données réelles de SwissSound.</a:t>
+              <a:t>Les exercices GESCOM 19-21 sont disponibles dans le bac a sable SQL.</a:t>
             </a:r>
             <a:endParaRPr lang="en-US" dirty="0"/>
           </a:p>
@@ -1695,7 +1695,7 @@
               <a:buNone/>
             </a:pPr>
             <a:r>
-              <a:rPr lang="en-US" sz="3200" b="1" dirty="0">
+              <a:rPr lang="en-US" sz="2800" b="1" dirty="0">
                 <a:solidFill>
                   <a:srgbClr val="FFFFFF"/>
                 </a:solidFill>
@@ -1705,7 +1705,7 @@
               </a:rPr>
               <a:t>DML INSERT UPDATE DELETE</a:t>
             </a:r>
-            <a:endParaRPr lang="en-US" sz="3200" dirty="0"/>
+            <a:endParaRPr lang="en-US" sz="2800" dirty="0"/>
           </a:p>
         </p:txBody>
       </p:sp>
@@ -1734,7 +1734,7 @@
               <a:buNone/>
             </a:pPr>
             <a:r>
-              <a:rPr lang="en-US" sz="1500" dirty="0">
+              <a:rPr lang="en-US" sz="1400" dirty="0">
                 <a:solidFill>
                   <a:srgbClr val="CCCCCC"/>
                 </a:solidFill>
@@ -1742,9 +1742,9 @@
                 <a:ea typeface="Calibri" pitchFamily="34" charset="-122"/>
                 <a:cs typeface="Calibri" pitchFamily="34" charset="-120"/>
               </a:rPr>
-              <a:t>Transactions ACID · COMMIT · ROLLBACK</a:t>
-            </a:r>
-            <a:endParaRPr lang="en-US" sz="1500" dirty="0"/>
+              <a:t>Peuplement, transactions ACID, COMMIT, ROLLBACK, SAVEPOINT</a:t>
+            </a:r>
+            <a:endParaRPr lang="en-US" sz="1400" dirty="0"/>
           </a:p>
         </p:txBody>
       </p:sp>
@@ -1848,7 +1848,7 @@
         <p:spPr>
           <a:xfrm>
             <a:off x="457200" y="182880"/>
-            <a:ext cx="8229600" cy="594360"/>
+            <a:ext cx="8229600" cy="502920"/>
           </a:xfrm>
           <a:prstGeom prst="rect">
             <a:avLst/>
@@ -1864,7 +1864,7 @@
               <a:buNone/>
             </a:pPr>
             <a:r>
-              <a:rPr lang="en-US" sz="2400" b="1" dirty="0">
+              <a:rPr lang="en-US" sz="2100" b="1" dirty="0">
                 <a:solidFill>
                   <a:srgbClr val="0D47A1"/>
                 </a:solidFill>
@@ -1874,7 +1874,7 @@
               </a:rPr>
               <a:t>INSERT INTO — peupler les tables</a:t>
             </a:r>
-            <a:endParaRPr lang="en-US" sz="2400" dirty="0"/>
+            <a:endParaRPr lang="en-US" sz="2100" dirty="0"/>
           </a:p>
         </p:txBody>
       </p:sp>
@@ -1886,8 +1886,8 @@
         </p:nvSpPr>
         <p:spPr>
           <a:xfrm>
-            <a:off x="457200" y="914400"/>
-            <a:ext cx="8229600" cy="521208"/>
+            <a:off x="457200" y="777240"/>
+            <a:ext cx="8229600" cy="448056"/>
           </a:xfrm>
           <a:prstGeom prst="rect">
             <a:avLst/>
@@ -1896,13 +1896,6 @@
             <a:srgbClr val="FFFFFF"/>
           </a:solidFill>
           <a:ln/>
-          <a:effectLst>
-            <a:outerShdw sx="100000" sy="100000" kx="0" ky="0" algn="bl" rotWithShape="0" blurRad="50800" dist="25400" dir="8100000">
-              <a:srgbClr val="000000">
-                <a:alpha val="12000"/>
-              </a:srgbClr>
-            </a:outerShdw>
-          </a:effectLst>
         </p:spPr>
       </p:sp>
       <p:sp>
@@ -1913,8 +1906,8 @@
         </p:nvSpPr>
         <p:spPr>
           <a:xfrm>
-            <a:off x="457200" y="914400"/>
-            <a:ext cx="45720" cy="521208"/>
+            <a:off x="457200" y="777240"/>
+            <a:ext cx="45720" cy="448056"/>
           </a:xfrm>
           <a:prstGeom prst="rect">
             <a:avLst/>
@@ -1933,8 +1926,8 @@
         </p:nvSpPr>
         <p:spPr>
           <a:xfrm>
-            <a:off x="685800" y="914400"/>
-            <a:ext cx="7818120" cy="521208"/>
+            <a:off x="640080" y="777240"/>
+            <a:ext cx="7863840" cy="448056"/>
           </a:xfrm>
           <a:prstGeom prst="rect">
             <a:avLst/>
@@ -1958,7 +1951,7 @@
                 <a:ea typeface="JetBrains Mono" pitchFamily="34" charset="-122"/>
                 <a:cs typeface="JetBrains Mono" pitchFamily="34" charset="-120"/>
               </a:rPr>
-              <a:t>INSERT INTO artiste (nom, prenom, email) VALUES ('Léman', 'Marc', 'marc@mail.ch');</a:t>
+              <a:t>INSERT INTO artiste (nom, prenom, email) VALUES ('Leman', 'Marc', 'marc@mail.ch');</a:t>
             </a:r>
             <a:endParaRPr lang="en-US" sz="1000" dirty="0"/>
           </a:p>
@@ -1972,8 +1965,8 @@
         </p:nvSpPr>
         <p:spPr>
           <a:xfrm>
-            <a:off x="457200" y="1463040"/>
-            <a:ext cx="8229600" cy="521208"/>
+            <a:off x="457200" y="1252728"/>
+            <a:ext cx="8229600" cy="448056"/>
           </a:xfrm>
           <a:prstGeom prst="rect">
             <a:avLst/>
@@ -1982,13 +1975,6 @@
             <a:srgbClr val="E3F2FD"/>
           </a:solidFill>
           <a:ln/>
-          <a:effectLst>
-            <a:outerShdw sx="100000" sy="100000" kx="0" ky="0" algn="bl" rotWithShape="0" blurRad="50800" dist="25400" dir="8100000">
-              <a:srgbClr val="000000">
-                <a:alpha val="12000"/>
-              </a:srgbClr>
-            </a:outerShdw>
-          </a:effectLst>
         </p:spPr>
       </p:sp>
       <p:sp>
@@ -1999,8 +1985,8 @@
         </p:nvSpPr>
         <p:spPr>
           <a:xfrm>
-            <a:off x="457200" y="1463040"/>
-            <a:ext cx="45720" cy="521208"/>
+            <a:off x="457200" y="1252728"/>
+            <a:ext cx="45720" cy="448056"/>
           </a:xfrm>
           <a:prstGeom prst="rect">
             <a:avLst/>
@@ -2019,8 +2005,8 @@
         </p:nvSpPr>
         <p:spPr>
           <a:xfrm>
-            <a:off x="685800" y="1463040"/>
-            <a:ext cx="7818120" cy="521208"/>
+            <a:off x="640080" y="1252728"/>
+            <a:ext cx="7863840" cy="448056"/>
           </a:xfrm>
           <a:prstGeom prst="rect">
             <a:avLst/>
@@ -2036,17 +2022,17 @@
               <a:buNone/>
             </a:pPr>
             <a:r>
-              <a:rPr lang="en-US" sz="1000" dirty="0">
+              <a:rPr lang="en-US" sz="1100" dirty="0">
                 <a:solidFill>
-                  <a:srgbClr val="0D47A1"/>
+                  <a:srgbClr val="1A1A2E"/>
                 </a:solidFill>
-                <a:latin typeface="JetBrains Mono" pitchFamily="34" charset="0"/>
-                <a:ea typeface="JetBrains Mono" pitchFamily="34" charset="-122"/>
-                <a:cs typeface="JetBrains Mono" pitchFamily="34" charset="-120"/>
+                <a:latin typeface="Calibri" pitchFamily="34" charset="0"/>
+                <a:ea typeface="Calibri" pitchFamily="34" charset="-122"/>
+                <a:cs typeface="Calibri" pitchFamily="34" charset="-120"/>
               </a:rPr>
-              <a:t>INSERT avec toutes les colonnes nommées = BONNE PRATIQUE</a:t>
-            </a:r>
-            <a:endParaRPr lang="en-US" sz="1000" dirty="0"/>
+              <a:t>Nommer les colonnes = BONNE PRATIQUE</a:t>
+            </a:r>
+            <a:endParaRPr lang="en-US" sz="1100" dirty="0"/>
           </a:p>
         </p:txBody>
       </p:sp>
@@ -2058,8 +2044,8 @@
         </p:nvSpPr>
         <p:spPr>
           <a:xfrm>
-            <a:off x="457200" y="2011680"/>
-            <a:ext cx="8229600" cy="521208"/>
+            <a:off x="457200" y="1728216"/>
+            <a:ext cx="8229600" cy="448056"/>
           </a:xfrm>
           <a:prstGeom prst="rect">
             <a:avLst/>
@@ -2068,13 +2054,6 @@
             <a:srgbClr val="FFFFFF"/>
           </a:solidFill>
           <a:ln/>
-          <a:effectLst>
-            <a:outerShdw sx="100000" sy="100000" kx="0" ky="0" algn="bl" rotWithShape="0" blurRad="50800" dist="25400" dir="8100000">
-              <a:srgbClr val="000000">
-                <a:alpha val="12000"/>
-              </a:srgbClr>
-            </a:outerShdw>
-          </a:effectLst>
         </p:spPr>
       </p:sp>
       <p:sp>
@@ -2085,8 +2064,8 @@
         </p:nvSpPr>
         <p:spPr>
           <a:xfrm>
-            <a:off x="457200" y="2011680"/>
-            <a:ext cx="45720" cy="521208"/>
+            <a:off x="457200" y="1728216"/>
+            <a:ext cx="45720" cy="448056"/>
           </a:xfrm>
           <a:prstGeom prst="rect">
             <a:avLst/>
@@ -2105,8 +2084,8 @@
         </p:nvSpPr>
         <p:spPr>
           <a:xfrm>
-            <a:off x="685800" y="2011680"/>
-            <a:ext cx="7818120" cy="521208"/>
+            <a:off x="640080" y="1728216"/>
+            <a:ext cx="7863840" cy="448056"/>
           </a:xfrm>
           <a:prstGeom prst="rect">
             <a:avLst/>
@@ -2144,8 +2123,8 @@
         </p:nvSpPr>
         <p:spPr>
           <a:xfrm>
-            <a:off x="457200" y="2560320"/>
-            <a:ext cx="8229600" cy="521208"/>
+            <a:off x="457200" y="2203704"/>
+            <a:ext cx="8229600" cy="448056"/>
           </a:xfrm>
           <a:prstGeom prst="rect">
             <a:avLst/>
@@ -2154,13 +2133,6 @@
             <a:srgbClr val="E3F2FD"/>
           </a:solidFill>
           <a:ln/>
-          <a:effectLst>
-            <a:outerShdw sx="100000" sy="100000" kx="0" ky="0" algn="bl" rotWithShape="0" blurRad="50800" dist="25400" dir="8100000">
-              <a:srgbClr val="000000">
-                <a:alpha val="12000"/>
-              </a:srgbClr>
-            </a:outerShdw>
-          </a:effectLst>
         </p:spPr>
       </p:sp>
       <p:sp>
@@ -2171,8 +2143,8 @@
         </p:nvSpPr>
         <p:spPr>
           <a:xfrm>
-            <a:off x="457200" y="2560320"/>
-            <a:ext cx="45720" cy="521208"/>
+            <a:off x="457200" y="2203704"/>
+            <a:ext cx="45720" cy="448056"/>
           </a:xfrm>
           <a:prstGeom prst="rect">
             <a:avLst/>
@@ -2191,8 +2163,8 @@
         </p:nvSpPr>
         <p:spPr>
           <a:xfrm>
-            <a:off x="685800" y="2560320"/>
-            <a:ext cx="7818120" cy="521208"/>
+            <a:off x="640080" y="2203704"/>
+            <a:ext cx="7863840" cy="448056"/>
           </a:xfrm>
           <a:prstGeom prst="rect">
             <a:avLst/>
@@ -2230,8 +2202,8 @@
         </p:nvSpPr>
         <p:spPr>
           <a:xfrm>
-            <a:off x="457200" y="3108960"/>
-            <a:ext cx="8229600" cy="521208"/>
+            <a:off x="457200" y="2679192"/>
+            <a:ext cx="8229600" cy="448056"/>
           </a:xfrm>
           <a:prstGeom prst="rect">
             <a:avLst/>
@@ -2240,13 +2212,6 @@
             <a:srgbClr val="FFFFFF"/>
           </a:solidFill>
           <a:ln/>
-          <a:effectLst>
-            <a:outerShdw sx="100000" sy="100000" kx="0" ky="0" algn="bl" rotWithShape="0" blurRad="50800" dist="25400" dir="8100000">
-              <a:srgbClr val="000000">
-                <a:alpha val="12000"/>
-              </a:srgbClr>
-            </a:outerShdw>
-          </a:effectLst>
         </p:spPr>
       </p:sp>
       <p:sp>
@@ -2257,8 +2222,8 @@
         </p:nvSpPr>
         <p:spPr>
           <a:xfrm>
-            <a:off x="457200" y="3108960"/>
-            <a:ext cx="45720" cy="521208"/>
+            <a:off x="457200" y="2679192"/>
+            <a:ext cx="45720" cy="448056"/>
           </a:xfrm>
           <a:prstGeom prst="rect">
             <a:avLst/>
@@ -2277,8 +2242,8 @@
         </p:nvSpPr>
         <p:spPr>
           <a:xfrm>
-            <a:off x="685800" y="3108960"/>
-            <a:ext cx="7818120" cy="521208"/>
+            <a:off x="640080" y="2679192"/>
+            <a:ext cx="7863840" cy="448056"/>
           </a:xfrm>
           <a:prstGeom prst="rect">
             <a:avLst/>
@@ -2294,7 +2259,7 @@
               <a:buNone/>
             </a:pPr>
             <a:r>
-              <a:rPr lang="en-US" sz="1200" dirty="0">
+              <a:rPr lang="en-US" sz="1100" dirty="0">
                 <a:solidFill>
                   <a:srgbClr val="1A1A2E"/>
                 </a:solidFill>
@@ -2302,9 +2267,9 @@
                 <a:ea typeface="Calibri" pitchFamily="34" charset="-122"/>
                 <a:cs typeface="Calibri" pitchFamily="34" charset="-120"/>
               </a:rPr>
-              <a:t>Respecter l'ORDRE des FK : parents d'abord (genre, artiste) puis enfants (album)</a:t>
-            </a:r>
-            <a:endParaRPr lang="en-US" sz="1200" dirty="0"/>
+              <a:t>Respecter l'ORDRE FK : parents d'abord (genre, artiste)</a:t>
+            </a:r>
+            <a:endParaRPr lang="en-US" sz="1100" dirty="0"/>
           </a:p>
         </p:txBody>
       </p:sp>
@@ -2316,8 +2281,8 @@
         </p:nvSpPr>
         <p:spPr>
           <a:xfrm>
-            <a:off x="457200" y="3657600"/>
-            <a:ext cx="8229600" cy="521208"/>
+            <a:off x="457200" y="3154680"/>
+            <a:ext cx="8229600" cy="448056"/>
           </a:xfrm>
           <a:prstGeom prst="rect">
             <a:avLst/>
@@ -2326,13 +2291,6 @@
             <a:srgbClr val="E3F2FD"/>
           </a:solidFill>
           <a:ln/>
-          <a:effectLst>
-            <a:outerShdw sx="100000" sy="100000" kx="0" ky="0" algn="bl" rotWithShape="0" blurRad="50800" dist="25400" dir="8100000">
-              <a:srgbClr val="000000">
-                <a:alpha val="12000"/>
-              </a:srgbClr>
-            </a:outerShdw>
-          </a:effectLst>
         </p:spPr>
       </p:sp>
       <p:sp>
@@ -2343,8 +2301,8 @@
         </p:nvSpPr>
         <p:spPr>
           <a:xfrm>
-            <a:off x="457200" y="3657600"/>
-            <a:ext cx="45720" cy="521208"/>
+            <a:off x="457200" y="3154680"/>
+            <a:ext cx="45720" cy="448056"/>
           </a:xfrm>
           <a:prstGeom prst="rect">
             <a:avLst/>
@@ -2363,8 +2321,8 @@
         </p:nvSpPr>
         <p:spPr>
           <a:xfrm>
-            <a:off x="685800" y="3657600"/>
-            <a:ext cx="7818120" cy="521208"/>
+            <a:off x="640080" y="3154680"/>
+            <a:ext cx="7863840" cy="448056"/>
           </a:xfrm>
           <a:prstGeom prst="rect">
             <a:avLst/>
@@ -2380,7 +2338,7 @@
               <a:buNone/>
             </a:pPr>
             <a:r>
-              <a:rPr lang="en-US" sz="1200" dirty="0">
+              <a:rPr lang="en-US" sz="1100" dirty="0">
                 <a:solidFill>
                   <a:srgbClr val="1A1A2E"/>
                 </a:solidFill>
@@ -2388,9 +2346,88 @@
                 <a:ea typeface="Calibri" pitchFamily="34" charset="-122"/>
                 <a:cs typeface="Calibri" pitchFamily="34" charset="-120"/>
               </a:rPr>
-              <a:t>Le script sql/01_insert_data.sql contient toutes les données SwissSound</a:t>
-            </a:r>
-            <a:endParaRPr lang="en-US" sz="1200" dirty="0"/>
+              <a:t>puis enfants (album, session)</a:t>
+            </a:r>
+            <a:endParaRPr lang="en-US" sz="1100" dirty="0"/>
+          </a:p>
+        </p:txBody>
+      </p:sp>
+      <p:sp>
+        <p:nvSpPr>
+          <p:cNvPr id="22" name="Shape 20"/>
+          <p:cNvSpPr/>
+          <p:nvPr/>
+        </p:nvSpPr>
+        <p:spPr>
+          <a:xfrm>
+            <a:off x="457200" y="3630168"/>
+            <a:ext cx="8229600" cy="448056"/>
+          </a:xfrm>
+          <a:prstGeom prst="rect">
+            <a:avLst/>
+          </a:prstGeom>
+          <a:solidFill>
+            <a:srgbClr val="FFFFFF"/>
+          </a:solidFill>
+          <a:ln/>
+        </p:spPr>
+      </p:sp>
+      <p:sp>
+        <p:nvSpPr>
+          <p:cNvPr id="23" name="Shape 21"/>
+          <p:cNvSpPr/>
+          <p:nvPr/>
+        </p:nvSpPr>
+        <p:spPr>
+          <a:xfrm>
+            <a:off x="457200" y="3630168"/>
+            <a:ext cx="45720" cy="448056"/>
+          </a:xfrm>
+          <a:prstGeom prst="rect">
+            <a:avLst/>
+          </a:prstGeom>
+          <a:solidFill>
+            <a:srgbClr val="1565C0"/>
+          </a:solidFill>
+          <a:ln/>
+        </p:spPr>
+      </p:sp>
+      <p:sp>
+        <p:nvSpPr>
+          <p:cNvPr id="24" name="Text 22"/>
+          <p:cNvSpPr/>
+          <p:nvPr/>
+        </p:nvSpPr>
+        <p:spPr>
+          <a:xfrm>
+            <a:off x="640080" y="3630168"/>
+            <a:ext cx="7863840" cy="448056"/>
+          </a:xfrm>
+          <a:prstGeom prst="rect">
+            <a:avLst/>
+          </a:prstGeom>
+          <a:noFill/>
+          <a:ln/>
+        </p:spPr>
+        <p:txBody>
+          <a:bodyPr wrap="square" lIns="0" tIns="0" rIns="0" bIns="0" rtlCol="0" anchor="ctr"/>
+          <a:lstStyle/>
+          <a:p>
+            <a:pPr indent="0" marL="0">
+              <a:buNone/>
+            </a:pPr>
+            <a:r>
+              <a:rPr lang="en-US" sz="1100" dirty="0">
+                <a:solidFill>
+                  <a:srgbClr val="1A1A2E"/>
+                </a:solidFill>
+                <a:latin typeface="Calibri" pitchFamily="34" charset="0"/>
+                <a:ea typeface="Calibri" pitchFamily="34" charset="-122"/>
+                <a:cs typeface="Calibri" pitchFamily="34" charset="-120"/>
+              </a:rPr>
+              <a:t>Script sql/01_insert_data.sql contient toutes les donnees SwissSound</a:t>
+            </a:r>
+            <a:endParaRPr lang="en-US" sz="1100" dirty="0"/>
           </a:p>
         </p:txBody>
       </p:sp>
@@ -2455,7 +2492,7 @@
         <p:spPr>
           <a:xfrm>
             <a:off x="457200" y="182880"/>
-            <a:ext cx="8229600" cy="594360"/>
+            <a:ext cx="8229600" cy="502920"/>
           </a:xfrm>
           <a:prstGeom prst="rect">
             <a:avLst/>
@@ -2471,7 +2508,7 @@
               <a:buNone/>
             </a:pPr>
             <a:r>
-              <a:rPr lang="en-US" sz="2400" b="1" dirty="0">
+              <a:rPr lang="en-US" sz="2100" b="1" dirty="0">
                 <a:solidFill>
                   <a:srgbClr val="0D47A1"/>
                 </a:solidFill>
@@ -2479,9 +2516,9 @@
                 <a:ea typeface="Trebuchet MS" pitchFamily="34" charset="-122"/>
                 <a:cs typeface="Trebuchet MS" pitchFamily="34" charset="-120"/>
               </a:rPr>
-              <a:t>UPDATE — modifier des données</a:t>
-            </a:r>
-            <a:endParaRPr lang="en-US" sz="2400" dirty="0"/>
+              <a:t>UPDATE — modifier des donnees</a:t>
+            </a:r>
+            <a:endParaRPr lang="en-US" sz="2100" dirty="0"/>
           </a:p>
         </p:txBody>
       </p:sp>
@@ -2493,8 +2530,8 @@
         </p:nvSpPr>
         <p:spPr>
           <a:xfrm>
-            <a:off x="457200" y="914400"/>
-            <a:ext cx="8229600" cy="521208"/>
+            <a:off x="457200" y="777240"/>
+            <a:ext cx="8229600" cy="448056"/>
           </a:xfrm>
           <a:prstGeom prst="rect">
             <a:avLst/>
@@ -2503,13 +2540,6 @@
             <a:srgbClr val="FFFFFF"/>
           </a:solidFill>
           <a:ln/>
-          <a:effectLst>
-            <a:outerShdw sx="100000" sy="100000" kx="0" ky="0" algn="bl" rotWithShape="0" blurRad="50800" dist="25400" dir="8100000">
-              <a:srgbClr val="000000">
-                <a:alpha val="12000"/>
-              </a:srgbClr>
-            </a:outerShdw>
-          </a:effectLst>
         </p:spPr>
       </p:sp>
       <p:sp>
@@ -2520,8 +2550,8 @@
         </p:nvSpPr>
         <p:spPr>
           <a:xfrm>
-            <a:off x="457200" y="914400"/>
-            <a:ext cx="45720" cy="521208"/>
+            <a:off x="457200" y="777240"/>
+            <a:ext cx="45720" cy="448056"/>
           </a:xfrm>
           <a:prstGeom prst="rect">
             <a:avLst/>
@@ -2540,8 +2570,8 @@
         </p:nvSpPr>
         <p:spPr>
           <a:xfrm>
-            <a:off x="685800" y="914400"/>
-            <a:ext cx="7818120" cy="521208"/>
+            <a:off x="640080" y="777240"/>
+            <a:ext cx="7863840" cy="448056"/>
           </a:xfrm>
           <a:prstGeom prst="rect">
             <a:avLst/>
@@ -2557,7 +2587,7 @@
               <a:buNone/>
             </a:pPr>
             <a:r>
-              <a:rPr lang="en-US" sz="1200" dirty="0">
+              <a:rPr lang="en-US" sz="1100" dirty="0">
                 <a:solidFill>
                   <a:srgbClr val="1A1A2E"/>
                 </a:solidFill>
@@ -2567,7 +2597,7 @@
               </a:rPr>
               <a:t>UPDATE artiste SET email = 'nouveau@mail.ch' WHERE id_artiste = 1;</a:t>
             </a:r>
-            <a:endParaRPr lang="en-US" sz="1200" dirty="0"/>
+            <a:endParaRPr lang="en-US" sz="1100" dirty="0"/>
           </a:p>
         </p:txBody>
       </p:sp>
@@ -2579,8 +2609,8 @@
         </p:nvSpPr>
         <p:spPr>
           <a:xfrm>
-            <a:off x="457200" y="1463040"/>
-            <a:ext cx="8229600" cy="521208"/>
+            <a:off x="457200" y="1252728"/>
+            <a:ext cx="8229600" cy="448056"/>
           </a:xfrm>
           <a:prstGeom prst="rect">
             <a:avLst/>
@@ -2589,13 +2619,6 @@
             <a:srgbClr val="E3F2FD"/>
           </a:solidFill>
           <a:ln/>
-          <a:effectLst>
-            <a:outerShdw sx="100000" sy="100000" kx="0" ky="0" algn="bl" rotWithShape="0" blurRad="50800" dist="25400" dir="8100000">
-              <a:srgbClr val="000000">
-                <a:alpha val="12000"/>
-              </a:srgbClr>
-            </a:outerShdw>
-          </a:effectLst>
         </p:spPr>
       </p:sp>
       <p:sp>
@@ -2606,8 +2629,8 @@
         </p:nvSpPr>
         <p:spPr>
           <a:xfrm>
-            <a:off x="457200" y="1463040"/>
-            <a:ext cx="45720" cy="521208"/>
+            <a:off x="457200" y="1252728"/>
+            <a:ext cx="45720" cy="448056"/>
           </a:xfrm>
           <a:prstGeom prst="rect">
             <a:avLst/>
@@ -2626,8 +2649,8 @@
         </p:nvSpPr>
         <p:spPr>
           <a:xfrm>
-            <a:off x="685800" y="1463040"/>
-            <a:ext cx="7818120" cy="521208"/>
+            <a:off x="640080" y="1252728"/>
+            <a:ext cx="7863840" cy="448056"/>
           </a:xfrm>
           <a:prstGeom prst="rect">
             <a:avLst/>
@@ -2643,7 +2666,7 @@
               <a:buNone/>
             </a:pPr>
             <a:r>
-              <a:rPr lang="en-US" sz="1200" dirty="0">
+              <a:rPr lang="en-US" sz="1100" dirty="0">
                 <a:solidFill>
                   <a:srgbClr val="1A1A2E"/>
                 </a:solidFill>
@@ -2651,9 +2674,9 @@
                 <a:ea typeface="Calibri" pitchFamily="34" charset="-122"/>
                 <a:cs typeface="Calibri" pitchFamily="34" charset="-120"/>
               </a:rPr>
-              <a:t>⚠️ TOUJOURS vérifier le WHERE avant d'exécuter !</a:t>
-            </a:r>
-            <a:endParaRPr lang="en-US" sz="1200" dirty="0"/>
+              <a:t>REGLE D'OR : TOUJOURS verifier le WHERE avant d'executer</a:t>
+            </a:r>
+            <a:endParaRPr lang="en-US" sz="1100" dirty="0"/>
           </a:p>
         </p:txBody>
       </p:sp>
@@ -2665,8 +2688,8 @@
         </p:nvSpPr>
         <p:spPr>
           <a:xfrm>
-            <a:off x="457200" y="2011680"/>
-            <a:ext cx="8229600" cy="521208"/>
+            <a:off x="457200" y="1728216"/>
+            <a:ext cx="8229600" cy="448056"/>
           </a:xfrm>
           <a:prstGeom prst="rect">
             <a:avLst/>
@@ -2675,13 +2698,6 @@
             <a:srgbClr val="FFFFFF"/>
           </a:solidFill>
           <a:ln/>
-          <a:effectLst>
-            <a:outerShdw sx="100000" sy="100000" kx="0" ky="0" algn="bl" rotWithShape="0" blurRad="50800" dist="25400" dir="8100000">
-              <a:srgbClr val="000000">
-                <a:alpha val="12000"/>
-              </a:srgbClr>
-            </a:outerShdw>
-          </a:effectLst>
         </p:spPr>
       </p:sp>
       <p:sp>
@@ -2692,8 +2708,8 @@
         </p:nvSpPr>
         <p:spPr>
           <a:xfrm>
-            <a:off x="457200" y="2011680"/>
-            <a:ext cx="45720" cy="521208"/>
+            <a:off x="457200" y="1728216"/>
+            <a:ext cx="45720" cy="448056"/>
           </a:xfrm>
           <a:prstGeom prst="rect">
             <a:avLst/>
@@ -2712,8 +2728,8 @@
         </p:nvSpPr>
         <p:spPr>
           <a:xfrm>
-            <a:off x="685800" y="2011680"/>
-            <a:ext cx="7818120" cy="521208"/>
+            <a:off x="640080" y="1728216"/>
+            <a:ext cx="7863840" cy="448056"/>
           </a:xfrm>
           <a:prstGeom prst="rect">
             <a:avLst/>
@@ -2729,7 +2745,7 @@
               <a:buNone/>
             </a:pPr>
             <a:r>
-              <a:rPr lang="en-US" sz="1200" dirty="0">
+              <a:rPr lang="en-US" sz="1100" dirty="0">
                 <a:solidFill>
                   <a:srgbClr val="1A1A2E"/>
                 </a:solidFill>
@@ -2737,9 +2753,9 @@
                 <a:ea typeface="Calibri" pitchFamily="34" charset="-122"/>
                 <a:cs typeface="Calibri" pitchFamily="34" charset="-120"/>
               </a:rPr>
-              <a:t>Astuce : d'abord SELECT ... WHERE ... pour voir ce qui sera modifié</a:t>
-            </a:r>
-            <a:endParaRPr lang="en-US" sz="1200" dirty="0"/>
+              <a:t>Astuce : SELECT ... WHERE ... AVANT pour voir ce qui sera modifie</a:t>
+            </a:r>
+            <a:endParaRPr lang="en-US" sz="1100" dirty="0"/>
           </a:p>
         </p:txBody>
       </p:sp>
@@ -2751,8 +2767,8 @@
         </p:nvSpPr>
         <p:spPr>
           <a:xfrm>
-            <a:off x="457200" y="2560320"/>
-            <a:ext cx="8229600" cy="521208"/>
+            <a:off x="457200" y="2203704"/>
+            <a:ext cx="8229600" cy="448056"/>
           </a:xfrm>
           <a:prstGeom prst="rect">
             <a:avLst/>
@@ -2761,13 +2777,6 @@
             <a:srgbClr val="E3F2FD"/>
           </a:solidFill>
           <a:ln/>
-          <a:effectLst>
-            <a:outerShdw sx="100000" sy="100000" kx="0" ky="0" algn="bl" rotWithShape="0" blurRad="50800" dist="25400" dir="8100000">
-              <a:srgbClr val="000000">
-                <a:alpha val="12000"/>
-              </a:srgbClr>
-            </a:outerShdw>
-          </a:effectLst>
         </p:spPr>
       </p:sp>
       <p:sp>
@@ -2778,8 +2787,8 @@
         </p:nvSpPr>
         <p:spPr>
           <a:xfrm>
-            <a:off x="457200" y="2560320"/>
-            <a:ext cx="45720" cy="521208"/>
+            <a:off x="457200" y="2203704"/>
+            <a:ext cx="45720" cy="448056"/>
           </a:xfrm>
           <a:prstGeom prst="rect">
             <a:avLst/>
@@ -2798,8 +2807,8 @@
         </p:nvSpPr>
         <p:spPr>
           <a:xfrm>
-            <a:off x="685800" y="2560320"/>
-            <a:ext cx="7818120" cy="521208"/>
+            <a:off x="640080" y="2203704"/>
+            <a:ext cx="7863840" cy="448056"/>
           </a:xfrm>
           <a:prstGeom prst="rect">
             <a:avLst/>
@@ -2815,7 +2824,7 @@
               <a:buNone/>
             </a:pPr>
             <a:r>
-              <a:rPr lang="en-US" sz="1200" dirty="0">
+              <a:rPr lang="en-US" sz="1100" dirty="0">
                 <a:solidFill>
                   <a:srgbClr val="1A1A2E"/>
                 </a:solidFill>
@@ -2825,7 +2834,7 @@
               </a:rPr>
               <a:t>UPDATE sans WHERE → modifie TOUTES les lignes !!!</a:t>
             </a:r>
-            <a:endParaRPr lang="en-US" sz="1200" dirty="0"/>
+            <a:endParaRPr lang="en-US" sz="1100" dirty="0"/>
           </a:p>
         </p:txBody>
       </p:sp>
@@ -2837,8 +2846,8 @@
         </p:nvSpPr>
         <p:spPr>
           <a:xfrm>
-            <a:off x="457200" y="3108960"/>
-            <a:ext cx="8229600" cy="521208"/>
+            <a:off x="457200" y="2679192"/>
+            <a:ext cx="8229600" cy="448056"/>
           </a:xfrm>
           <a:prstGeom prst="rect">
             <a:avLst/>
@@ -2847,13 +2856,6 @@
             <a:srgbClr val="FFFFFF"/>
           </a:solidFill>
           <a:ln/>
-          <a:effectLst>
-            <a:outerShdw sx="100000" sy="100000" kx="0" ky="0" algn="bl" rotWithShape="0" blurRad="50800" dist="25400" dir="8100000">
-              <a:srgbClr val="000000">
-                <a:alpha val="12000"/>
-              </a:srgbClr>
-            </a:outerShdw>
-          </a:effectLst>
         </p:spPr>
       </p:sp>
       <p:sp>
@@ -2864,8 +2866,8 @@
         </p:nvSpPr>
         <p:spPr>
           <a:xfrm>
-            <a:off x="457200" y="3108960"/>
-            <a:ext cx="45720" cy="521208"/>
+            <a:off x="457200" y="2679192"/>
+            <a:ext cx="45720" cy="448056"/>
           </a:xfrm>
           <a:prstGeom prst="rect">
             <a:avLst/>
@@ -2884,8 +2886,8 @@
         </p:nvSpPr>
         <p:spPr>
           <a:xfrm>
-            <a:off x="685800" y="3108960"/>
-            <a:ext cx="7818120" cy="521208"/>
+            <a:off x="640080" y="2679192"/>
+            <a:ext cx="7863840" cy="448056"/>
           </a:xfrm>
           <a:prstGeom prst="rect">
             <a:avLst/>
@@ -2901,7 +2903,165 @@
               <a:buNone/>
             </a:pPr>
             <a:r>
-              <a:rPr lang="en-US" sz="1200" dirty="0">
+              <a:rPr lang="en-US" sz="1100" dirty="0">
+                <a:solidFill>
+                  <a:srgbClr val="1A1A2E"/>
+                </a:solidFill>
+                <a:latin typeface="Calibri" pitchFamily="34" charset="0"/>
+                <a:ea typeface="Calibri" pitchFamily="34" charset="-122"/>
+                <a:cs typeface="Calibri" pitchFamily="34" charset="-120"/>
+              </a:rPr>
+              <a:t>Peut modifier plusieurs colonnes :</a:t>
+            </a:r>
+            <a:endParaRPr lang="en-US" sz="1100" dirty="0"/>
+          </a:p>
+        </p:txBody>
+      </p:sp>
+      <p:sp>
+        <p:nvSpPr>
+          <p:cNvPr id="19" name="Shape 17"/>
+          <p:cNvSpPr/>
+          <p:nvPr/>
+        </p:nvSpPr>
+        <p:spPr>
+          <a:xfrm>
+            <a:off x="457200" y="3154680"/>
+            <a:ext cx="8229600" cy="448056"/>
+          </a:xfrm>
+          <a:prstGeom prst="rect">
+            <a:avLst/>
+          </a:prstGeom>
+          <a:solidFill>
+            <a:srgbClr val="E3F2FD"/>
+          </a:solidFill>
+          <a:ln/>
+        </p:spPr>
+      </p:sp>
+      <p:sp>
+        <p:nvSpPr>
+          <p:cNvPr id="20" name="Shape 18"/>
+          <p:cNvSpPr/>
+          <p:nvPr/>
+        </p:nvSpPr>
+        <p:spPr>
+          <a:xfrm>
+            <a:off x="457200" y="3154680"/>
+            <a:ext cx="45720" cy="448056"/>
+          </a:xfrm>
+          <a:prstGeom prst="rect">
+            <a:avLst/>
+          </a:prstGeom>
+          <a:solidFill>
+            <a:srgbClr val="1565C0"/>
+          </a:solidFill>
+          <a:ln/>
+        </p:spPr>
+      </p:sp>
+      <p:sp>
+        <p:nvSpPr>
+          <p:cNvPr id="21" name="Text 19"/>
+          <p:cNvSpPr/>
+          <p:nvPr/>
+        </p:nvSpPr>
+        <p:spPr>
+          <a:xfrm>
+            <a:off x="640080" y="3154680"/>
+            <a:ext cx="7863840" cy="448056"/>
+          </a:xfrm>
+          <a:prstGeom prst="rect">
+            <a:avLst/>
+          </a:prstGeom>
+          <a:noFill/>
+          <a:ln/>
+        </p:spPr>
+        <p:txBody>
+          <a:bodyPr wrap="square" lIns="0" tIns="0" rIns="0" bIns="0" rtlCol="0" anchor="ctr"/>
+          <a:lstStyle/>
+          <a:p>
+            <a:pPr indent="0" marL="0">
+              <a:buNone/>
+            </a:pPr>
+            <a:r>
+              <a:rPr lang="en-US" sz="1000" dirty="0">
+                <a:solidFill>
+                  <a:srgbClr val="0D47A1"/>
+                </a:solidFill>
+                <a:latin typeface="JetBrains Mono" pitchFamily="34" charset="0"/>
+                <a:ea typeface="JetBrains Mono" pitchFamily="34" charset="-122"/>
+                <a:cs typeface="JetBrains Mono" pitchFamily="34" charset="-120"/>
+              </a:rPr>
+              <a:t>  SET nom = 'Nouveau', email = 'new@mail.ch'</a:t>
+            </a:r>
+            <a:endParaRPr lang="en-US" sz="1000" dirty="0"/>
+          </a:p>
+        </p:txBody>
+      </p:sp>
+      <p:sp>
+        <p:nvSpPr>
+          <p:cNvPr id="22" name="Shape 20"/>
+          <p:cNvSpPr/>
+          <p:nvPr/>
+        </p:nvSpPr>
+        <p:spPr>
+          <a:xfrm>
+            <a:off x="457200" y="3630168"/>
+            <a:ext cx="8229600" cy="448056"/>
+          </a:xfrm>
+          <a:prstGeom prst="rect">
+            <a:avLst/>
+          </a:prstGeom>
+          <a:solidFill>
+            <a:srgbClr val="FFFFFF"/>
+          </a:solidFill>
+          <a:ln/>
+        </p:spPr>
+      </p:sp>
+      <p:sp>
+        <p:nvSpPr>
+          <p:cNvPr id="23" name="Shape 21"/>
+          <p:cNvSpPr/>
+          <p:nvPr/>
+        </p:nvSpPr>
+        <p:spPr>
+          <a:xfrm>
+            <a:off x="457200" y="3630168"/>
+            <a:ext cx="45720" cy="448056"/>
+          </a:xfrm>
+          <a:prstGeom prst="rect">
+            <a:avLst/>
+          </a:prstGeom>
+          <a:solidFill>
+            <a:srgbClr val="1565C0"/>
+          </a:solidFill>
+          <a:ln/>
+        </p:spPr>
+      </p:sp>
+      <p:sp>
+        <p:nvSpPr>
+          <p:cNvPr id="24" name="Text 22"/>
+          <p:cNvSpPr/>
+          <p:nvPr/>
+        </p:nvSpPr>
+        <p:spPr>
+          <a:xfrm>
+            <a:off x="640080" y="3630168"/>
+            <a:ext cx="7863840" cy="448056"/>
+          </a:xfrm>
+          <a:prstGeom prst="rect">
+            <a:avLst/>
+          </a:prstGeom>
+          <a:noFill/>
+          <a:ln/>
+        </p:spPr>
+        <p:txBody>
+          <a:bodyPr wrap="square" lIns="0" tIns="0" rIns="0" bIns="0" rtlCol="0" anchor="ctr"/>
+          <a:lstStyle/>
+          <a:p>
+            <a:pPr indent="0" marL="0">
+              <a:buNone/>
+            </a:pPr>
+            <a:r>
+              <a:rPr lang="en-US" sz="1100" dirty="0">
                 <a:solidFill>
                   <a:srgbClr val="1A1A2E"/>
                 </a:solidFill>
@@ -2911,93 +3071,7 @@
               </a:rPr>
               <a:t>UPDATE artiste SET actif = FALSE WHERE date_inscription &lt; '2023-01-01';</a:t>
             </a:r>
-            <a:endParaRPr lang="en-US" sz="1200" dirty="0"/>
-          </a:p>
-        </p:txBody>
-      </p:sp>
-      <p:sp>
-        <p:nvSpPr>
-          <p:cNvPr id="19" name="Shape 17"/>
-          <p:cNvSpPr/>
-          <p:nvPr/>
-        </p:nvSpPr>
-        <p:spPr>
-          <a:xfrm>
-            <a:off x="457200" y="3657600"/>
-            <a:ext cx="8229600" cy="521208"/>
-          </a:xfrm>
-          <a:prstGeom prst="rect">
-            <a:avLst/>
-          </a:prstGeom>
-          <a:solidFill>
-            <a:srgbClr val="E3F2FD"/>
-          </a:solidFill>
-          <a:ln/>
-          <a:effectLst>
-            <a:outerShdw sx="100000" sy="100000" kx="0" ky="0" algn="bl" rotWithShape="0" blurRad="50800" dist="25400" dir="8100000">
-              <a:srgbClr val="000000">
-                <a:alpha val="12000"/>
-              </a:srgbClr>
-            </a:outerShdw>
-          </a:effectLst>
-        </p:spPr>
-      </p:sp>
-      <p:sp>
-        <p:nvSpPr>
-          <p:cNvPr id="20" name="Shape 18"/>
-          <p:cNvSpPr/>
-          <p:nvPr/>
-        </p:nvSpPr>
-        <p:spPr>
-          <a:xfrm>
-            <a:off x="457200" y="3657600"/>
-            <a:ext cx="45720" cy="521208"/>
-          </a:xfrm>
-          <a:prstGeom prst="rect">
-            <a:avLst/>
-          </a:prstGeom>
-          <a:solidFill>
-            <a:srgbClr val="1565C0"/>
-          </a:solidFill>
-          <a:ln/>
-        </p:spPr>
-      </p:sp>
-      <p:sp>
-        <p:nvSpPr>
-          <p:cNvPr id="21" name="Text 19"/>
-          <p:cNvSpPr/>
-          <p:nvPr/>
-        </p:nvSpPr>
-        <p:spPr>
-          <a:xfrm>
-            <a:off x="685800" y="3657600"/>
-            <a:ext cx="7818120" cy="521208"/>
-          </a:xfrm>
-          <a:prstGeom prst="rect">
-            <a:avLst/>
-          </a:prstGeom>
-          <a:noFill/>
-          <a:ln/>
-        </p:spPr>
-        <p:txBody>
-          <a:bodyPr wrap="square" lIns="0" tIns="0" rIns="0" bIns="0" rtlCol="0" anchor="ctr"/>
-          <a:lstStyle/>
-          <a:p>
-            <a:pPr indent="0" marL="0">
-              <a:buNone/>
-            </a:pPr>
-            <a:r>
-              <a:rPr lang="en-US" sz="1200" dirty="0">
-                <a:solidFill>
-                  <a:srgbClr val="1A1A2E"/>
-                </a:solidFill>
-                <a:latin typeface="Calibri" pitchFamily="34" charset="0"/>
-                <a:ea typeface="Calibri" pitchFamily="34" charset="-122"/>
-                <a:cs typeface="Calibri" pitchFamily="34" charset="-120"/>
-              </a:rPr>
-              <a:t>Peut modifier plusieurs colonnes : SET nom = 'Nouveau', email = 'new@mail.ch'</a:t>
-            </a:r>
-            <a:endParaRPr lang="en-US" sz="1200" dirty="0"/>
+            <a:endParaRPr lang="en-US" sz="1100" dirty="0"/>
           </a:p>
         </p:txBody>
       </p:sp>
@@ -3062,7 +3136,7 @@
         <p:spPr>
           <a:xfrm>
             <a:off x="457200" y="182880"/>
-            <a:ext cx="8229600" cy="594360"/>
+            <a:ext cx="8229600" cy="502920"/>
           </a:xfrm>
           <a:prstGeom prst="rect">
             <a:avLst/>
@@ -3078,7 +3152,7 @@
               <a:buNone/>
             </a:pPr>
             <a:r>
-              <a:rPr lang="en-US" sz="2400" b="1" dirty="0">
+              <a:rPr lang="en-US" sz="2100" b="1" dirty="0">
                 <a:solidFill>
                   <a:srgbClr val="0D47A1"/>
                 </a:solidFill>
@@ -3086,9 +3160,9 @@
                 <a:ea typeface="Trebuchet MS" pitchFamily="34" charset="-122"/>
                 <a:cs typeface="Trebuchet MS" pitchFamily="34" charset="-120"/>
               </a:rPr>
-              <a:t>DELETE — supprimer des données</a:t>
-            </a:r>
-            <a:endParaRPr lang="en-US" sz="2400" dirty="0"/>
+              <a:t>DELETE — supprimer des donnees</a:t>
+            </a:r>
+            <a:endParaRPr lang="en-US" sz="2100" dirty="0"/>
           </a:p>
         </p:txBody>
       </p:sp>
@@ -3100,8 +3174,8 @@
         </p:nvSpPr>
         <p:spPr>
           <a:xfrm>
-            <a:off x="457200" y="914400"/>
-            <a:ext cx="8229600" cy="521208"/>
+            <a:off x="457200" y="777240"/>
+            <a:ext cx="8229600" cy="448056"/>
           </a:xfrm>
           <a:prstGeom prst="rect">
             <a:avLst/>
@@ -3110,13 +3184,6 @@
             <a:srgbClr val="FFFFFF"/>
           </a:solidFill>
           <a:ln/>
-          <a:effectLst>
-            <a:outerShdw sx="100000" sy="100000" kx="0" ky="0" algn="bl" rotWithShape="0" blurRad="50800" dist="25400" dir="8100000">
-              <a:srgbClr val="000000">
-                <a:alpha val="12000"/>
-              </a:srgbClr>
-            </a:outerShdw>
-          </a:effectLst>
         </p:spPr>
       </p:sp>
       <p:sp>
@@ -3127,8 +3194,8 @@
         </p:nvSpPr>
         <p:spPr>
           <a:xfrm>
-            <a:off x="457200" y="914400"/>
-            <a:ext cx="45720" cy="521208"/>
+            <a:off x="457200" y="777240"/>
+            <a:ext cx="45720" cy="448056"/>
           </a:xfrm>
           <a:prstGeom prst="rect">
             <a:avLst/>
@@ -3147,8 +3214,8 @@
         </p:nvSpPr>
         <p:spPr>
           <a:xfrm>
-            <a:off x="685800" y="914400"/>
-            <a:ext cx="7818120" cy="521208"/>
+            <a:off x="640080" y="777240"/>
+            <a:ext cx="7863840" cy="448056"/>
           </a:xfrm>
           <a:prstGeom prst="rect">
             <a:avLst/>
@@ -3164,7 +3231,7 @@
               <a:buNone/>
             </a:pPr>
             <a:r>
-              <a:rPr lang="en-US" sz="1200" dirty="0">
+              <a:rPr lang="en-US" sz="1100" dirty="0">
                 <a:solidFill>
                   <a:srgbClr val="1A1A2E"/>
                 </a:solidFill>
@@ -3174,7 +3241,7 @@
               </a:rPr>
               <a:t>DELETE FROM facture WHERE statut_paiement = 'annulee';</a:t>
             </a:r>
-            <a:endParaRPr lang="en-US" sz="1200" dirty="0"/>
+            <a:endParaRPr lang="en-US" sz="1100" dirty="0"/>
           </a:p>
         </p:txBody>
       </p:sp>
@@ -3186,8 +3253,8 @@
         </p:nvSpPr>
         <p:spPr>
           <a:xfrm>
-            <a:off x="457200" y="1463040"/>
-            <a:ext cx="8229600" cy="521208"/>
+            <a:off x="457200" y="1252728"/>
+            <a:ext cx="8229600" cy="448056"/>
           </a:xfrm>
           <a:prstGeom prst="rect">
             <a:avLst/>
@@ -3196,13 +3263,6 @@
             <a:srgbClr val="E3F2FD"/>
           </a:solidFill>
           <a:ln/>
-          <a:effectLst>
-            <a:outerShdw sx="100000" sy="100000" kx="0" ky="0" algn="bl" rotWithShape="0" blurRad="50800" dist="25400" dir="8100000">
-              <a:srgbClr val="000000">
-                <a:alpha val="12000"/>
-              </a:srgbClr>
-            </a:outerShdw>
-          </a:effectLst>
         </p:spPr>
       </p:sp>
       <p:sp>
@@ -3213,8 +3273,8 @@
         </p:nvSpPr>
         <p:spPr>
           <a:xfrm>
-            <a:off x="457200" y="1463040"/>
-            <a:ext cx="45720" cy="521208"/>
+            <a:off x="457200" y="1252728"/>
+            <a:ext cx="45720" cy="448056"/>
           </a:xfrm>
           <a:prstGeom prst="rect">
             <a:avLst/>
@@ -3233,8 +3293,8 @@
         </p:nvSpPr>
         <p:spPr>
           <a:xfrm>
-            <a:off x="685800" y="1463040"/>
-            <a:ext cx="7818120" cy="521208"/>
+            <a:off x="640080" y="1252728"/>
+            <a:ext cx="7863840" cy="448056"/>
           </a:xfrm>
           <a:prstGeom prst="rect">
             <a:avLst/>
@@ -3250,7 +3310,7 @@
               <a:buNone/>
             </a:pPr>
             <a:r>
-              <a:rPr lang="en-US" sz="1200" dirty="0">
+              <a:rPr lang="en-US" sz="1100" dirty="0">
                 <a:solidFill>
                   <a:srgbClr val="1A1A2E"/>
                 </a:solidFill>
@@ -3258,9 +3318,9 @@
                 <a:ea typeface="Calibri" pitchFamily="34" charset="-122"/>
                 <a:cs typeface="Calibri" pitchFamily="34" charset="-120"/>
               </a:rPr>
-              <a:t>⚠️ DELETE sans WHERE → supprime TOUTES les lignes !!!</a:t>
-            </a:r>
-            <a:endParaRPr lang="en-US" sz="1200" dirty="0"/>
+              <a:t>DELETE sans WHERE → supprime TOUTES les lignes !!!</a:t>
+            </a:r>
+            <a:endParaRPr lang="en-US" sz="1100" dirty="0"/>
           </a:p>
         </p:txBody>
       </p:sp>
@@ -3272,8 +3332,8 @@
         </p:nvSpPr>
         <p:spPr>
           <a:xfrm>
-            <a:off x="457200" y="2011680"/>
-            <a:ext cx="8229600" cy="521208"/>
+            <a:off x="457200" y="1728216"/>
+            <a:ext cx="8229600" cy="448056"/>
           </a:xfrm>
           <a:prstGeom prst="rect">
             <a:avLst/>
@@ -3282,13 +3342,6 @@
             <a:srgbClr val="FFFFFF"/>
           </a:solidFill>
           <a:ln/>
-          <a:effectLst>
-            <a:outerShdw sx="100000" sy="100000" kx="0" ky="0" algn="bl" rotWithShape="0" blurRad="50800" dist="25400" dir="8100000">
-              <a:srgbClr val="000000">
-                <a:alpha val="12000"/>
-              </a:srgbClr>
-            </a:outerShdw>
-          </a:effectLst>
         </p:spPr>
       </p:sp>
       <p:sp>
@@ -3299,8 +3352,8 @@
         </p:nvSpPr>
         <p:spPr>
           <a:xfrm>
-            <a:off x="457200" y="2011680"/>
-            <a:ext cx="45720" cy="521208"/>
+            <a:off x="457200" y="1728216"/>
+            <a:ext cx="45720" cy="448056"/>
           </a:xfrm>
           <a:prstGeom prst="rect">
             <a:avLst/>
@@ -3319,8 +3372,8 @@
         </p:nvSpPr>
         <p:spPr>
           <a:xfrm>
-            <a:off x="685800" y="2011680"/>
-            <a:ext cx="7818120" cy="521208"/>
+            <a:off x="640080" y="1728216"/>
+            <a:ext cx="7863840" cy="448056"/>
           </a:xfrm>
           <a:prstGeom prst="rect">
             <a:avLst/>
@@ -3336,7 +3389,7 @@
               <a:buNone/>
             </a:pPr>
             <a:r>
-              <a:rPr lang="en-US" sz="1200" dirty="0">
+              <a:rPr lang="en-US" sz="1100" dirty="0">
                 <a:solidFill>
                   <a:srgbClr val="1A1A2E"/>
                 </a:solidFill>
@@ -3344,9 +3397,9 @@
                 <a:ea typeface="Calibri" pitchFamily="34" charset="-122"/>
                 <a:cs typeface="Calibri" pitchFamily="34" charset="-120"/>
               </a:rPr>
-              <a:t>⚠️ TRUNCATE TABLE artiste; → supprime tout + reset AUTO_INCREMENT</a:t>
-            </a:r>
-            <a:endParaRPr lang="en-US" sz="1200" dirty="0"/>
+              <a:t>TRUNCATE TABLE artiste; → supprime tout + reset AUTO_INCREMENT</a:t>
+            </a:r>
+            <a:endParaRPr lang="en-US" sz="1100" dirty="0"/>
           </a:p>
         </p:txBody>
       </p:sp>
@@ -3358,8 +3411,8 @@
         </p:nvSpPr>
         <p:spPr>
           <a:xfrm>
-            <a:off x="457200" y="2560320"/>
-            <a:ext cx="8229600" cy="521208"/>
+            <a:off x="457200" y="2203704"/>
+            <a:ext cx="8229600" cy="448056"/>
           </a:xfrm>
           <a:prstGeom prst="rect">
             <a:avLst/>
@@ -3368,13 +3421,6 @@
             <a:srgbClr val="E3F2FD"/>
           </a:solidFill>
           <a:ln/>
-          <a:effectLst>
-            <a:outerShdw sx="100000" sy="100000" kx="0" ky="0" algn="bl" rotWithShape="0" blurRad="50800" dist="25400" dir="8100000">
-              <a:srgbClr val="000000">
-                <a:alpha val="12000"/>
-              </a:srgbClr>
-            </a:outerShdw>
-          </a:effectLst>
         </p:spPr>
       </p:sp>
       <p:sp>
@@ -3385,8 +3431,8 @@
         </p:nvSpPr>
         <p:spPr>
           <a:xfrm>
-            <a:off x="457200" y="2560320"/>
-            <a:ext cx="45720" cy="521208"/>
+            <a:off x="457200" y="2203704"/>
+            <a:ext cx="45720" cy="448056"/>
           </a:xfrm>
           <a:prstGeom prst="rect">
             <a:avLst/>
@@ -3405,8 +3451,8 @@
         </p:nvSpPr>
         <p:spPr>
           <a:xfrm>
-            <a:off x="685800" y="2560320"/>
-            <a:ext cx="7818120" cy="521208"/>
+            <a:off x="640080" y="2203704"/>
+            <a:ext cx="7863840" cy="448056"/>
           </a:xfrm>
           <a:prstGeom prst="rect">
             <a:avLst/>
@@ -3422,7 +3468,7 @@
               <a:buNone/>
             </a:pPr>
             <a:r>
-              <a:rPr lang="en-US" sz="1200" dirty="0">
+              <a:rPr lang="en-US" sz="1100" dirty="0">
                 <a:solidFill>
                   <a:srgbClr val="1A1A2E"/>
                 </a:solidFill>
@@ -3430,9 +3476,9 @@
                 <a:ea typeface="Calibri" pitchFamily="34" charset="-122"/>
                 <a:cs typeface="Calibri" pitchFamily="34" charset="-120"/>
               </a:rPr>
-              <a:t>Différence DELETE vs TRUNCATE : DELETE peut être dans une transaction, TRUNCATE non</a:t>
-            </a:r>
-            <a:endParaRPr lang="en-US" sz="1200" dirty="0"/>
+              <a:t>Difference DELETE vs TRUNCATE : DELETE dans transaction, TRUNCATE non</a:t>
+            </a:r>
+            <a:endParaRPr lang="en-US" sz="1100" dirty="0"/>
           </a:p>
         </p:txBody>
       </p:sp>
@@ -3444,8 +3490,8 @@
         </p:nvSpPr>
         <p:spPr>
           <a:xfrm>
-            <a:off x="457200" y="3108960"/>
-            <a:ext cx="8229600" cy="521208"/>
+            <a:off x="457200" y="2679192"/>
+            <a:ext cx="8229600" cy="448056"/>
           </a:xfrm>
           <a:prstGeom prst="rect">
             <a:avLst/>
@@ -3454,13 +3500,6 @@
             <a:srgbClr val="FFFFFF"/>
           </a:solidFill>
           <a:ln/>
-          <a:effectLst>
-            <a:outerShdw sx="100000" sy="100000" kx="0" ky="0" algn="bl" rotWithShape="0" blurRad="50800" dist="25400" dir="8100000">
-              <a:srgbClr val="000000">
-                <a:alpha val="12000"/>
-              </a:srgbClr>
-            </a:outerShdw>
-          </a:effectLst>
         </p:spPr>
       </p:sp>
       <p:sp>
@@ -3471,8 +3510,8 @@
         </p:nvSpPr>
         <p:spPr>
           <a:xfrm>
-            <a:off x="457200" y="3108960"/>
-            <a:ext cx="45720" cy="521208"/>
+            <a:off x="457200" y="2679192"/>
+            <a:ext cx="45720" cy="448056"/>
           </a:xfrm>
           <a:prstGeom prst="rect">
             <a:avLst/>
@@ -3491,8 +3530,8 @@
         </p:nvSpPr>
         <p:spPr>
           <a:xfrm>
-            <a:off x="685800" y="3108960"/>
-            <a:ext cx="7818120" cy="521208"/>
+            <a:off x="640080" y="2679192"/>
+            <a:ext cx="7863840" cy="448056"/>
           </a:xfrm>
           <a:prstGeom prst="rect">
             <a:avLst/>
@@ -3508,7 +3547,7 @@
               <a:buNone/>
             </a:pPr>
             <a:r>
-              <a:rPr lang="en-US" sz="1200" dirty="0">
+              <a:rPr lang="en-US" sz="1100" dirty="0">
                 <a:solidFill>
                   <a:srgbClr val="1A1A2E"/>
                 </a:solidFill>
@@ -3516,9 +3555,9 @@
                 <a:ea typeface="Calibri" pitchFamily="34" charset="-122"/>
                 <a:cs typeface="Calibri" pitchFamily="34" charset="-120"/>
               </a:rPr>
-              <a:t>Astuce : SELECT COUNT(*) ... WHERE ... avant DELETE pour voir combien de lignes</a:t>
-            </a:r>
-            <a:endParaRPr lang="en-US" sz="1200" dirty="0"/>
+              <a:t>Astuce : SELECT COUNT(*) ... WHERE ... avant DELETE</a:t>
+            </a:r>
+            <a:endParaRPr lang="en-US" sz="1100" dirty="0"/>
           </a:p>
         </p:txBody>
       </p:sp>
@@ -3530,8 +3569,8 @@
         </p:nvSpPr>
         <p:spPr>
           <a:xfrm>
-            <a:off x="457200" y="3657600"/>
-            <a:ext cx="8229600" cy="521208"/>
+            <a:off x="457200" y="3154680"/>
+            <a:ext cx="8229600" cy="448056"/>
           </a:xfrm>
           <a:prstGeom prst="rect">
             <a:avLst/>
@@ -3540,13 +3579,6 @@
             <a:srgbClr val="E3F2FD"/>
           </a:solidFill>
           <a:ln/>
-          <a:effectLst>
-            <a:outerShdw sx="100000" sy="100000" kx="0" ky="0" algn="bl" rotWithShape="0" blurRad="50800" dist="25400" dir="8100000">
-              <a:srgbClr val="000000">
-                <a:alpha val="12000"/>
-              </a:srgbClr>
-            </a:outerShdw>
-          </a:effectLst>
         </p:spPr>
       </p:sp>
       <p:sp>
@@ -3557,8 +3589,8 @@
         </p:nvSpPr>
         <p:spPr>
           <a:xfrm>
-            <a:off x="457200" y="3657600"/>
-            <a:ext cx="45720" cy="521208"/>
+            <a:off x="457200" y="3154680"/>
+            <a:ext cx="45720" cy="448056"/>
           </a:xfrm>
           <a:prstGeom prst="rect">
             <a:avLst/>
@@ -3577,8 +3609,8 @@
         </p:nvSpPr>
         <p:spPr>
           <a:xfrm>
-            <a:off x="685800" y="3657600"/>
-            <a:ext cx="7818120" cy="521208"/>
+            <a:off x="640080" y="3154680"/>
+            <a:ext cx="7863840" cy="448056"/>
           </a:xfrm>
           <a:prstGeom prst="rect">
             <a:avLst/>
@@ -3594,7 +3626,7 @@
               <a:buNone/>
             </a:pPr>
             <a:r>
-              <a:rPr lang="en-US" sz="1200" dirty="0">
+              <a:rPr lang="en-US" sz="1100" dirty="0">
                 <a:solidFill>
                   <a:srgbClr val="1A1A2E"/>
                 </a:solidFill>
@@ -3602,9 +3634,88 @@
                 <a:ea typeface="Calibri" pitchFamily="34" charset="-122"/>
                 <a:cs typeface="Calibri" pitchFamily="34" charset="-120"/>
               </a:rPr>
-              <a:t>Les FK RESTRICT bloquent le DELETE si des enfants existent</a:t>
-            </a:r>
-            <a:endParaRPr lang="en-US" sz="1200" dirty="0"/>
+              <a:t>Les FK RESTRICT bloquent le DELETE si enfants existent</a:t>
+            </a:r>
+            <a:endParaRPr lang="en-US" sz="1100" dirty="0"/>
+          </a:p>
+        </p:txBody>
+      </p:sp>
+      <p:sp>
+        <p:nvSpPr>
+          <p:cNvPr id="22" name="Shape 20"/>
+          <p:cNvSpPr/>
+          <p:nvPr/>
+        </p:nvSpPr>
+        <p:spPr>
+          <a:xfrm>
+            <a:off x="457200" y="3630168"/>
+            <a:ext cx="8229600" cy="448056"/>
+          </a:xfrm>
+          <a:prstGeom prst="rect">
+            <a:avLst/>
+          </a:prstGeom>
+          <a:solidFill>
+            <a:srgbClr val="FFFFFF"/>
+          </a:solidFill>
+          <a:ln/>
+        </p:spPr>
+      </p:sp>
+      <p:sp>
+        <p:nvSpPr>
+          <p:cNvPr id="23" name="Shape 21"/>
+          <p:cNvSpPr/>
+          <p:nvPr/>
+        </p:nvSpPr>
+        <p:spPr>
+          <a:xfrm>
+            <a:off x="457200" y="3630168"/>
+            <a:ext cx="45720" cy="448056"/>
+          </a:xfrm>
+          <a:prstGeom prst="rect">
+            <a:avLst/>
+          </a:prstGeom>
+          <a:solidFill>
+            <a:srgbClr val="1565C0"/>
+          </a:solidFill>
+          <a:ln/>
+        </p:spPr>
+      </p:sp>
+      <p:sp>
+        <p:nvSpPr>
+          <p:cNvPr id="24" name="Text 22"/>
+          <p:cNvSpPr/>
+          <p:nvPr/>
+        </p:nvSpPr>
+        <p:spPr>
+          <a:xfrm>
+            <a:off x="640080" y="3630168"/>
+            <a:ext cx="7863840" cy="448056"/>
+          </a:xfrm>
+          <a:prstGeom prst="rect">
+            <a:avLst/>
+          </a:prstGeom>
+          <a:noFill/>
+          <a:ln/>
+        </p:spPr>
+        <p:txBody>
+          <a:bodyPr wrap="square" lIns="0" tIns="0" rIns="0" bIns="0" rtlCol="0" anchor="ctr"/>
+          <a:lstStyle/>
+          <a:p>
+            <a:pPr indent="0" marL="0">
+              <a:buNone/>
+            </a:pPr>
+            <a:r>
+              <a:rPr lang="en-US" sz="1100" dirty="0">
+                <a:solidFill>
+                  <a:srgbClr val="1A1A2E"/>
+                </a:solidFill>
+                <a:latin typeface="Calibri" pitchFamily="34" charset="0"/>
+                <a:ea typeface="Calibri" pitchFamily="34" charset="-122"/>
+                <a:cs typeface="Calibri" pitchFamily="34" charset="-120"/>
+              </a:rPr>
+              <a:t>→ Erreur 1451 si on essaie de supprimer un artiste avec albums</a:t>
+            </a:r>
+            <a:endParaRPr lang="en-US" sz="1100" dirty="0"/>
           </a:p>
         </p:txBody>
       </p:sp>
@@ -3669,7 +3780,7 @@
         <p:spPr>
           <a:xfrm>
             <a:off x="457200" y="182880"/>
-            <a:ext cx="8229600" cy="594360"/>
+            <a:ext cx="8229600" cy="502920"/>
           </a:xfrm>
           <a:prstGeom prst="rect">
             <a:avLst/>
@@ -3685,7 +3796,7 @@
               <a:buNone/>
             </a:pPr>
             <a:r>
-              <a:rPr lang="en-US" sz="2400" b="1" dirty="0">
+              <a:rPr lang="en-US" sz="2100" b="1" dirty="0">
                 <a:solidFill>
                   <a:srgbClr val="0D47A1"/>
                 </a:solidFill>
@@ -3695,7 +3806,7 @@
               </a:rPr>
               <a:t>Transactions : BEGIN, COMMIT, ROLLBACK</a:t>
             </a:r>
-            <a:endParaRPr lang="en-US" sz="2400" dirty="0"/>
+            <a:endParaRPr lang="en-US" sz="2100" dirty="0"/>
           </a:p>
         </p:txBody>
       </p:sp>
@@ -3707,7 +3818,7 @@
         </p:nvSpPr>
         <p:spPr>
           <a:xfrm>
-            <a:off x="457200" y="914400"/>
+            <a:off x="457200" y="777240"/>
             <a:ext cx="8229600" cy="409448"/>
           </a:xfrm>
           <a:prstGeom prst="rect">
@@ -3717,13 +3828,6 @@
             <a:srgbClr val="FFFFFF"/>
           </a:solidFill>
           <a:ln/>
-          <a:effectLst>
-            <a:outerShdw sx="100000" sy="100000" kx="0" ky="0" algn="bl" rotWithShape="0" blurRad="50800" dist="25400" dir="8100000">
-              <a:srgbClr val="000000">
-                <a:alpha val="12000"/>
-              </a:srgbClr>
-            </a:outerShdw>
-          </a:effectLst>
         </p:spPr>
       </p:sp>
       <p:sp>
@@ -3734,7 +3838,7 @@
         </p:nvSpPr>
         <p:spPr>
           <a:xfrm>
-            <a:off x="457200" y="914400"/>
+            <a:off x="457200" y="777240"/>
             <a:ext cx="45720" cy="409448"/>
           </a:xfrm>
           <a:prstGeom prst="rect">
@@ -3754,8 +3858,245 @@
         </p:nvSpPr>
         <p:spPr>
           <a:xfrm>
-            <a:off x="685800" y="914400"/>
-            <a:ext cx="7818120" cy="409448"/>
+            <a:off x="640080" y="777240"/>
+            <a:ext cx="7863840" cy="409448"/>
+          </a:xfrm>
+          <a:prstGeom prst="rect">
+            <a:avLst/>
+          </a:prstGeom>
+          <a:noFill/>
+          <a:ln/>
+        </p:spPr>
+        <p:txBody>
+          <a:bodyPr wrap="square" lIns="0" tIns="0" rIns="0" bIns="0" rtlCol="0" anchor="ctr"/>
+          <a:lstStyle/>
+          <a:p>
+            <a:pPr indent="0" marL="0">
+              <a:buNone/>
+            </a:pPr>
+            <a:r>
+              <a:rPr lang="en-US" sz="1100" dirty="0">
+                <a:solidFill>
+                  <a:srgbClr val="1A1A2E"/>
+                </a:solidFill>
+                <a:latin typeface="Calibri" pitchFamily="34" charset="0"/>
+                <a:ea typeface="Calibri" pitchFamily="34" charset="-122"/>
+                <a:cs typeface="Calibri" pitchFamily="34" charset="-120"/>
+              </a:rPr>
+              <a:t>START TRANSACTION; — ou BEGIN;</a:t>
+            </a:r>
+            <a:endParaRPr lang="en-US" sz="1100" dirty="0"/>
+          </a:p>
+        </p:txBody>
+      </p:sp>
+      <p:sp>
+        <p:nvSpPr>
+          <p:cNvPr id="7" name="Shape 5"/>
+          <p:cNvSpPr/>
+          <p:nvPr/>
+        </p:nvSpPr>
+        <p:spPr>
+          <a:xfrm>
+            <a:off x="457200" y="1214120"/>
+            <a:ext cx="8229600" cy="409448"/>
+          </a:xfrm>
+          <a:prstGeom prst="rect">
+            <a:avLst/>
+          </a:prstGeom>
+          <a:solidFill>
+            <a:srgbClr val="E3F2FD"/>
+          </a:solidFill>
+          <a:ln/>
+        </p:spPr>
+      </p:sp>
+      <p:sp>
+        <p:nvSpPr>
+          <p:cNvPr id="8" name="Shape 6"/>
+          <p:cNvSpPr/>
+          <p:nvPr/>
+        </p:nvSpPr>
+        <p:spPr>
+          <a:xfrm>
+            <a:off x="457200" y="1214120"/>
+            <a:ext cx="45720" cy="409448"/>
+          </a:xfrm>
+          <a:prstGeom prst="rect">
+            <a:avLst/>
+          </a:prstGeom>
+          <a:solidFill>
+            <a:srgbClr val="1565C0"/>
+          </a:solidFill>
+          <a:ln/>
+        </p:spPr>
+      </p:sp>
+      <p:sp>
+        <p:nvSpPr>
+          <p:cNvPr id="9" name="Text 7"/>
+          <p:cNvSpPr/>
+          <p:nvPr/>
+        </p:nvSpPr>
+        <p:spPr>
+          <a:xfrm>
+            <a:off x="640080" y="1214120"/>
+            <a:ext cx="7863840" cy="409448"/>
+          </a:xfrm>
+          <a:prstGeom prst="rect">
+            <a:avLst/>
+          </a:prstGeom>
+          <a:noFill/>
+          <a:ln/>
+        </p:spPr>
+        <p:txBody>
+          <a:bodyPr wrap="square" lIns="0" tIns="0" rIns="0" bIns="0" rtlCol="0" anchor="ctr"/>
+          <a:lstStyle/>
+          <a:p>
+            <a:pPr indent="0" marL="0">
+              <a:buNone/>
+            </a:pPr>
+            <a:r>
+              <a:rPr lang="en-US" sz="1100" dirty="0">
+                <a:solidFill>
+                  <a:srgbClr val="1A1A2E"/>
+                </a:solidFill>
+                <a:latin typeface="Calibri" pitchFamily="34" charset="0"/>
+                <a:ea typeface="Calibri" pitchFamily="34" charset="-122"/>
+                <a:cs typeface="Calibri" pitchFamily="34" charset="-120"/>
+              </a:rPr>
+              <a:t>UPDATE artiste SET actif = FALSE WHERE id_artiste = 5;</a:t>
+            </a:r>
+            <a:endParaRPr lang="en-US" sz="1100" dirty="0"/>
+          </a:p>
+        </p:txBody>
+      </p:sp>
+      <p:sp>
+        <p:nvSpPr>
+          <p:cNvPr id="10" name="Shape 8"/>
+          <p:cNvSpPr/>
+          <p:nvPr/>
+        </p:nvSpPr>
+        <p:spPr>
+          <a:xfrm>
+            <a:off x="457200" y="1651000"/>
+            <a:ext cx="8229600" cy="409448"/>
+          </a:xfrm>
+          <a:prstGeom prst="rect">
+            <a:avLst/>
+          </a:prstGeom>
+          <a:solidFill>
+            <a:srgbClr val="FFFFFF"/>
+          </a:solidFill>
+          <a:ln/>
+        </p:spPr>
+      </p:sp>
+      <p:sp>
+        <p:nvSpPr>
+          <p:cNvPr id="11" name="Shape 9"/>
+          <p:cNvSpPr/>
+          <p:nvPr/>
+        </p:nvSpPr>
+        <p:spPr>
+          <a:xfrm>
+            <a:off x="457200" y="1651000"/>
+            <a:ext cx="45720" cy="409448"/>
+          </a:xfrm>
+          <a:prstGeom prst="rect">
+            <a:avLst/>
+          </a:prstGeom>
+          <a:solidFill>
+            <a:srgbClr val="1565C0"/>
+          </a:solidFill>
+          <a:ln/>
+        </p:spPr>
+      </p:sp>
+      <p:sp>
+        <p:nvSpPr>
+          <p:cNvPr id="12" name="Text 10"/>
+          <p:cNvSpPr/>
+          <p:nvPr/>
+        </p:nvSpPr>
+        <p:spPr>
+          <a:xfrm>
+            <a:off x="640080" y="1651000"/>
+            <a:ext cx="7863840" cy="409448"/>
+          </a:xfrm>
+          <a:prstGeom prst="rect">
+            <a:avLst/>
+          </a:prstGeom>
+          <a:noFill/>
+          <a:ln/>
+        </p:spPr>
+        <p:txBody>
+          <a:bodyPr wrap="square" lIns="0" tIns="0" rIns="0" bIns="0" rtlCol="0" anchor="ctr"/>
+          <a:lstStyle/>
+          <a:p>
+            <a:pPr indent="0" marL="0">
+              <a:buNone/>
+            </a:pPr>
+            <a:r>
+              <a:rPr lang="en-US" sz="1100" dirty="0">
+                <a:solidFill>
+                  <a:srgbClr val="1A1A2E"/>
+                </a:solidFill>
+                <a:latin typeface="Calibri" pitchFamily="34" charset="0"/>
+                <a:ea typeface="Calibri" pitchFamily="34" charset="-122"/>
+                <a:cs typeface="Calibri" pitchFamily="34" charset="-120"/>
+              </a:rPr>
+              <a:t>DELETE FROM facture WHERE id_facture = 3;</a:t>
+            </a:r>
+            <a:endParaRPr lang="en-US" sz="1100" dirty="0"/>
+          </a:p>
+        </p:txBody>
+      </p:sp>
+      <p:sp>
+        <p:nvSpPr>
+          <p:cNvPr id="13" name="Shape 11"/>
+          <p:cNvSpPr/>
+          <p:nvPr/>
+        </p:nvSpPr>
+        <p:spPr>
+          <a:xfrm>
+            <a:off x="457200" y="2087880"/>
+            <a:ext cx="8229600" cy="409448"/>
+          </a:xfrm>
+          <a:prstGeom prst="rect">
+            <a:avLst/>
+          </a:prstGeom>
+          <a:solidFill>
+            <a:srgbClr val="E3F2FD"/>
+          </a:solidFill>
+          <a:ln/>
+        </p:spPr>
+      </p:sp>
+      <p:sp>
+        <p:nvSpPr>
+          <p:cNvPr id="14" name="Shape 12"/>
+          <p:cNvSpPr/>
+          <p:nvPr/>
+        </p:nvSpPr>
+        <p:spPr>
+          <a:xfrm>
+            <a:off x="457200" y="2087880"/>
+            <a:ext cx="45720" cy="409448"/>
+          </a:xfrm>
+          <a:prstGeom prst="rect">
+            <a:avLst/>
+          </a:prstGeom>
+          <a:solidFill>
+            <a:srgbClr val="1565C0"/>
+          </a:solidFill>
+          <a:ln/>
+        </p:spPr>
+      </p:sp>
+      <p:sp>
+        <p:nvSpPr>
+          <p:cNvPr id="15" name="Text 13"/>
+          <p:cNvSpPr/>
+          <p:nvPr/>
+        </p:nvSpPr>
+        <p:spPr>
+          <a:xfrm>
+            <a:off x="640080" y="2087880"/>
+            <a:ext cx="7863840" cy="409448"/>
           </a:xfrm>
           <a:prstGeom prst="rect">
             <a:avLst/>
@@ -3779,7 +4120,7 @@
                 <a:ea typeface="JetBrains Mono" pitchFamily="34" charset="-122"/>
                 <a:cs typeface="JetBrains Mono" pitchFamily="34" charset="-120"/>
               </a:rPr>
-              <a:t>START TRANSACTION;  -- ou BEGIN;</a:t>
+              <a:t>-- Verifier les resultats avec SELECT...</a:t>
             </a:r>
             <a:endParaRPr lang="en-US" sz="1000" dirty="0"/>
           </a:p>
@@ -3787,40 +4128,33 @@
       </p:sp>
       <p:sp>
         <p:nvSpPr>
-          <p:cNvPr id="7" name="Shape 5"/>
-          <p:cNvSpPr/>
-          <p:nvPr/>
-        </p:nvSpPr>
-        <p:spPr>
-          <a:xfrm>
-            <a:off x="457200" y="1351280"/>
+          <p:cNvPr id="16" name="Shape 14"/>
+          <p:cNvSpPr/>
+          <p:nvPr/>
+        </p:nvSpPr>
+        <p:spPr>
+          <a:xfrm>
+            <a:off x="457200" y="2524760"/>
             <a:ext cx="8229600" cy="409448"/>
           </a:xfrm>
           <a:prstGeom prst="rect">
             <a:avLst/>
           </a:prstGeom>
           <a:solidFill>
-            <a:srgbClr val="E3F2FD"/>
-          </a:solidFill>
-          <a:ln/>
-          <a:effectLst>
-            <a:outerShdw sx="100000" sy="100000" kx="0" ky="0" algn="bl" rotWithShape="0" blurRad="50800" dist="25400" dir="8100000">
-              <a:srgbClr val="000000">
-                <a:alpha val="12000"/>
-              </a:srgbClr>
-            </a:outerShdw>
-          </a:effectLst>
-        </p:spPr>
-      </p:sp>
-      <p:sp>
-        <p:nvSpPr>
-          <p:cNvPr id="8" name="Shape 6"/>
-          <p:cNvSpPr/>
-          <p:nvPr/>
-        </p:nvSpPr>
-        <p:spPr>
-          <a:xfrm>
-            <a:off x="457200" y="1351280"/>
+            <a:srgbClr val="FFFFFF"/>
+          </a:solidFill>
+          <a:ln/>
+        </p:spPr>
+      </p:sp>
+      <p:sp>
+        <p:nvSpPr>
+          <p:cNvPr id="17" name="Shape 15"/>
+          <p:cNvSpPr/>
+          <p:nvPr/>
+        </p:nvSpPr>
+        <p:spPr>
+          <a:xfrm>
+            <a:off x="457200" y="2524760"/>
             <a:ext cx="45720" cy="409448"/>
           </a:xfrm>
           <a:prstGeom prst="rect">
@@ -3834,186 +4168,14 @@
       </p:sp>
       <p:sp>
         <p:nvSpPr>
-          <p:cNvPr id="9" name="Text 7"/>
-          <p:cNvSpPr/>
-          <p:nvPr/>
-        </p:nvSpPr>
-        <p:spPr>
-          <a:xfrm>
-            <a:off x="685800" y="1351280"/>
-            <a:ext cx="7818120" cy="409448"/>
-          </a:xfrm>
-          <a:prstGeom prst="rect">
-            <a:avLst/>
-          </a:prstGeom>
-          <a:noFill/>
-          <a:ln/>
-        </p:spPr>
-        <p:txBody>
-          <a:bodyPr wrap="square" lIns="0" tIns="0" rIns="0" bIns="0" rtlCol="0" anchor="ctr"/>
-          <a:lstStyle/>
-          <a:p>
-            <a:pPr indent="0" marL="0">
-              <a:buNone/>
-            </a:pPr>
-            <a:r>
-              <a:rPr lang="en-US" sz="1200" dirty="0">
-                <a:solidFill>
-                  <a:srgbClr val="1A1A2E"/>
-                </a:solidFill>
-                <a:latin typeface="Calibri" pitchFamily="34" charset="0"/>
-                <a:ea typeface="Calibri" pitchFamily="34" charset="-122"/>
-                <a:cs typeface="Calibri" pitchFamily="34" charset="-120"/>
-              </a:rPr>
-              <a:t>UPDATE artiste SET actif = FALSE WHERE id_artiste = 5;</a:t>
-            </a:r>
-            <a:endParaRPr lang="en-US" sz="1200" dirty="0"/>
-          </a:p>
-        </p:txBody>
-      </p:sp>
-      <p:sp>
-        <p:nvSpPr>
-          <p:cNvPr id="10" name="Shape 8"/>
-          <p:cNvSpPr/>
-          <p:nvPr/>
-        </p:nvSpPr>
-        <p:spPr>
-          <a:xfrm>
-            <a:off x="457200" y="1788160"/>
-            <a:ext cx="8229600" cy="409448"/>
-          </a:xfrm>
-          <a:prstGeom prst="rect">
-            <a:avLst/>
-          </a:prstGeom>
-          <a:solidFill>
-            <a:srgbClr val="FFFFFF"/>
-          </a:solidFill>
-          <a:ln/>
-          <a:effectLst>
-            <a:outerShdw sx="100000" sy="100000" kx="0" ky="0" algn="bl" rotWithShape="0" blurRad="50800" dist="25400" dir="8100000">
-              <a:srgbClr val="000000">
-                <a:alpha val="12000"/>
-              </a:srgbClr>
-            </a:outerShdw>
-          </a:effectLst>
-        </p:spPr>
-      </p:sp>
-      <p:sp>
-        <p:nvSpPr>
-          <p:cNvPr id="11" name="Shape 9"/>
-          <p:cNvSpPr/>
-          <p:nvPr/>
-        </p:nvSpPr>
-        <p:spPr>
-          <a:xfrm>
-            <a:off x="457200" y="1788160"/>
-            <a:ext cx="45720" cy="409448"/>
-          </a:xfrm>
-          <a:prstGeom prst="rect">
-            <a:avLst/>
-          </a:prstGeom>
-          <a:solidFill>
-            <a:srgbClr val="1565C0"/>
-          </a:solidFill>
-          <a:ln/>
-        </p:spPr>
-      </p:sp>
-      <p:sp>
-        <p:nvSpPr>
-          <p:cNvPr id="12" name="Text 10"/>
-          <p:cNvSpPr/>
-          <p:nvPr/>
-        </p:nvSpPr>
-        <p:spPr>
-          <a:xfrm>
-            <a:off x="685800" y="1788160"/>
-            <a:ext cx="7818120" cy="409448"/>
-          </a:xfrm>
-          <a:prstGeom prst="rect">
-            <a:avLst/>
-          </a:prstGeom>
-          <a:noFill/>
-          <a:ln/>
-        </p:spPr>
-        <p:txBody>
-          <a:bodyPr wrap="square" lIns="0" tIns="0" rIns="0" bIns="0" rtlCol="0" anchor="ctr"/>
-          <a:lstStyle/>
-          <a:p>
-            <a:pPr indent="0" marL="0">
-              <a:buNone/>
-            </a:pPr>
-            <a:r>
-              <a:rPr lang="en-US" sz="1200" dirty="0">
-                <a:solidFill>
-                  <a:srgbClr val="1A1A2E"/>
-                </a:solidFill>
-                <a:latin typeface="Calibri" pitchFamily="34" charset="0"/>
-                <a:ea typeface="Calibri" pitchFamily="34" charset="-122"/>
-                <a:cs typeface="Calibri" pitchFamily="34" charset="-120"/>
-              </a:rPr>
-              <a:t>DELETE FROM facture WHERE id_facture = 3;</a:t>
-            </a:r>
-            <a:endParaRPr lang="en-US" sz="1200" dirty="0"/>
-          </a:p>
-        </p:txBody>
-      </p:sp>
-      <p:sp>
-        <p:nvSpPr>
-          <p:cNvPr id="13" name="Shape 11"/>
-          <p:cNvSpPr/>
-          <p:nvPr/>
-        </p:nvSpPr>
-        <p:spPr>
-          <a:xfrm>
-            <a:off x="457200" y="2225040"/>
-            <a:ext cx="8229600" cy="409448"/>
-          </a:xfrm>
-          <a:prstGeom prst="rect">
-            <a:avLst/>
-          </a:prstGeom>
-          <a:solidFill>
-            <a:srgbClr val="E3F2FD"/>
-          </a:solidFill>
-          <a:ln/>
-          <a:effectLst>
-            <a:outerShdw sx="100000" sy="100000" kx="0" ky="0" algn="bl" rotWithShape="0" blurRad="50800" dist="25400" dir="8100000">
-              <a:srgbClr val="000000">
-                <a:alpha val="12000"/>
-              </a:srgbClr>
-            </a:outerShdw>
-          </a:effectLst>
-        </p:spPr>
-      </p:sp>
-      <p:sp>
-        <p:nvSpPr>
-          <p:cNvPr id="14" name="Shape 12"/>
-          <p:cNvSpPr/>
-          <p:nvPr/>
-        </p:nvSpPr>
-        <p:spPr>
-          <a:xfrm>
-            <a:off x="457200" y="2225040"/>
-            <a:ext cx="45720" cy="409448"/>
-          </a:xfrm>
-          <a:prstGeom prst="rect">
-            <a:avLst/>
-          </a:prstGeom>
-          <a:solidFill>
-            <a:srgbClr val="1565C0"/>
-          </a:solidFill>
-          <a:ln/>
-        </p:spPr>
-      </p:sp>
-      <p:sp>
-        <p:nvSpPr>
-          <p:cNvPr id="15" name="Text 13"/>
-          <p:cNvSpPr/>
-          <p:nvPr/>
-        </p:nvSpPr>
-        <p:spPr>
-          <a:xfrm>
-            <a:off x="685800" y="2225040"/>
-            <a:ext cx="7818120" cy="409448"/>
+          <p:cNvPr id="18" name="Text 16"/>
+          <p:cNvSpPr/>
+          <p:nvPr/>
+        </p:nvSpPr>
+        <p:spPr>
+          <a:xfrm>
+            <a:off x="640080" y="2524760"/>
+            <a:ext cx="7863840" cy="409448"/>
           </a:xfrm>
           <a:prstGeom prst="rect">
             <a:avLst/>
@@ -4037,7 +4199,7 @@
                 <a:ea typeface="JetBrains Mono" pitchFamily="34" charset="-122"/>
                 <a:cs typeface="JetBrains Mono" pitchFamily="34" charset="-120"/>
               </a:rPr>
-              <a:t>-- Vérifier les résultats avec SELECT...</a:t>
+              <a:t>COMMIT; — tout est sauvegarde definitivement</a:t>
             </a:r>
             <a:endParaRPr lang="en-US" sz="1000" dirty="0"/>
           </a:p>
@@ -4045,40 +4207,33 @@
       </p:sp>
       <p:sp>
         <p:nvSpPr>
-          <p:cNvPr id="16" name="Shape 14"/>
-          <p:cNvSpPr/>
-          <p:nvPr/>
-        </p:nvSpPr>
-        <p:spPr>
-          <a:xfrm>
-            <a:off x="457200" y="2661920"/>
+          <p:cNvPr id="19" name="Shape 17"/>
+          <p:cNvSpPr/>
+          <p:nvPr/>
+        </p:nvSpPr>
+        <p:spPr>
+          <a:xfrm>
+            <a:off x="457200" y="2961640"/>
             <a:ext cx="8229600" cy="409448"/>
           </a:xfrm>
           <a:prstGeom prst="rect">
             <a:avLst/>
           </a:prstGeom>
           <a:solidFill>
-            <a:srgbClr val="FFFFFF"/>
-          </a:solidFill>
-          <a:ln/>
-          <a:effectLst>
-            <a:outerShdw sx="100000" sy="100000" kx="0" ky="0" algn="bl" rotWithShape="0" blurRad="50800" dist="25400" dir="8100000">
-              <a:srgbClr val="000000">
-                <a:alpha val="12000"/>
-              </a:srgbClr>
-            </a:outerShdw>
-          </a:effectLst>
-        </p:spPr>
-      </p:sp>
-      <p:sp>
-        <p:nvSpPr>
-          <p:cNvPr id="17" name="Shape 15"/>
-          <p:cNvSpPr/>
-          <p:nvPr/>
-        </p:nvSpPr>
-        <p:spPr>
-          <a:xfrm>
-            <a:off x="457200" y="2661920"/>
+            <a:srgbClr val="E3F2FD"/>
+          </a:solidFill>
+          <a:ln/>
+        </p:spPr>
+      </p:sp>
+      <p:sp>
+        <p:nvSpPr>
+          <p:cNvPr id="20" name="Shape 18"/>
+          <p:cNvSpPr/>
+          <p:nvPr/>
+        </p:nvSpPr>
+        <p:spPr>
+          <a:xfrm>
+            <a:off x="457200" y="2961640"/>
             <a:ext cx="45720" cy="409448"/>
           </a:xfrm>
           <a:prstGeom prst="rect">
@@ -4092,100 +4247,14 @@
       </p:sp>
       <p:sp>
         <p:nvSpPr>
-          <p:cNvPr id="18" name="Text 16"/>
-          <p:cNvSpPr/>
-          <p:nvPr/>
-        </p:nvSpPr>
-        <p:spPr>
-          <a:xfrm>
-            <a:off x="685800" y="2661920"/>
-            <a:ext cx="7818120" cy="409448"/>
-          </a:xfrm>
-          <a:prstGeom prst="rect">
-            <a:avLst/>
-          </a:prstGeom>
-          <a:noFill/>
-          <a:ln/>
-        </p:spPr>
-        <p:txBody>
-          <a:bodyPr wrap="square" lIns="0" tIns="0" rIns="0" bIns="0" rtlCol="0" anchor="ctr"/>
-          <a:lstStyle/>
-          <a:p>
-            <a:pPr indent="0" marL="0">
-              <a:buNone/>
-            </a:pPr>
-            <a:r>
-              <a:rPr lang="en-US" sz="1000" dirty="0">
-                <a:solidFill>
-                  <a:srgbClr val="0D47A1"/>
-                </a:solidFill>
-                <a:latin typeface="JetBrains Mono" pitchFamily="34" charset="0"/>
-                <a:ea typeface="JetBrains Mono" pitchFamily="34" charset="-122"/>
-                <a:cs typeface="JetBrains Mono" pitchFamily="34" charset="-120"/>
-              </a:rPr>
-              <a:t>COMMIT;  -- ✅ tout est sauvegardé définitivement</a:t>
-            </a:r>
-            <a:endParaRPr lang="en-US" sz="1000" dirty="0"/>
-          </a:p>
-        </p:txBody>
-      </p:sp>
-      <p:sp>
-        <p:nvSpPr>
-          <p:cNvPr id="19" name="Shape 17"/>
-          <p:cNvSpPr/>
-          <p:nvPr/>
-        </p:nvSpPr>
-        <p:spPr>
-          <a:xfrm>
-            <a:off x="457200" y="3098800"/>
-            <a:ext cx="8229600" cy="409448"/>
-          </a:xfrm>
-          <a:prstGeom prst="rect">
-            <a:avLst/>
-          </a:prstGeom>
-          <a:solidFill>
-            <a:srgbClr val="E3F2FD"/>
-          </a:solidFill>
-          <a:ln/>
-          <a:effectLst>
-            <a:outerShdw sx="100000" sy="100000" kx="0" ky="0" algn="bl" rotWithShape="0" blurRad="50800" dist="25400" dir="8100000">
-              <a:srgbClr val="000000">
-                <a:alpha val="12000"/>
-              </a:srgbClr>
-            </a:outerShdw>
-          </a:effectLst>
-        </p:spPr>
-      </p:sp>
-      <p:sp>
-        <p:nvSpPr>
-          <p:cNvPr id="20" name="Shape 18"/>
-          <p:cNvSpPr/>
-          <p:nvPr/>
-        </p:nvSpPr>
-        <p:spPr>
-          <a:xfrm>
-            <a:off x="457200" y="3098800"/>
-            <a:ext cx="45720" cy="409448"/>
-          </a:xfrm>
-          <a:prstGeom prst="rect">
-            <a:avLst/>
-          </a:prstGeom>
-          <a:solidFill>
-            <a:srgbClr val="1565C0"/>
-          </a:solidFill>
-          <a:ln/>
-        </p:spPr>
-      </p:sp>
-      <p:sp>
-        <p:nvSpPr>
           <p:cNvPr id="21" name="Text 19"/>
           <p:cNvSpPr/>
           <p:nvPr/>
         </p:nvSpPr>
         <p:spPr>
           <a:xfrm>
-            <a:off x="685800" y="3098800"/>
-            <a:ext cx="7818120" cy="409448"/>
+            <a:off x="640080" y="2961640"/>
+            <a:ext cx="7863840" cy="409448"/>
           </a:xfrm>
           <a:prstGeom prst="rect">
             <a:avLst/>
@@ -4223,7 +4292,7 @@
         </p:nvSpPr>
         <p:spPr>
           <a:xfrm>
-            <a:off x="457200" y="3535680"/>
+            <a:off x="457200" y="3398520"/>
             <a:ext cx="8229600" cy="409448"/>
           </a:xfrm>
           <a:prstGeom prst="rect">
@@ -4233,13 +4302,6 @@
             <a:srgbClr val="FFFFFF"/>
           </a:solidFill>
           <a:ln/>
-          <a:effectLst>
-            <a:outerShdw sx="100000" sy="100000" kx="0" ky="0" algn="bl" rotWithShape="0" blurRad="50800" dist="25400" dir="8100000">
-              <a:srgbClr val="000000">
-                <a:alpha val="12000"/>
-              </a:srgbClr>
-            </a:outerShdw>
-          </a:effectLst>
         </p:spPr>
       </p:sp>
       <p:sp>
@@ -4250,7 +4312,7 @@
         </p:nvSpPr>
         <p:spPr>
           <a:xfrm>
-            <a:off x="457200" y="3535680"/>
+            <a:off x="457200" y="3398520"/>
             <a:ext cx="45720" cy="409448"/>
           </a:xfrm>
           <a:prstGeom prst="rect">
@@ -4270,8 +4332,8 @@
         </p:nvSpPr>
         <p:spPr>
           <a:xfrm>
-            <a:off x="685800" y="3535680"/>
-            <a:ext cx="7818120" cy="409448"/>
+            <a:off x="640080" y="3398520"/>
+            <a:ext cx="7863840" cy="409448"/>
           </a:xfrm>
           <a:prstGeom prst="rect">
             <a:avLst/>
@@ -4295,7 +4357,7 @@
                 <a:ea typeface="JetBrains Mono" pitchFamily="34" charset="-122"/>
                 <a:cs typeface="JetBrains Mono" pitchFamily="34" charset="-120"/>
               </a:rPr>
-              <a:t>ROLLBACK;  -- ❌ tout est annulé, retour à l'état initial</a:t>
+              <a:t>ROLLBACK; — tout est annule, retour a l'etat initial</a:t>
             </a:r>
             <a:endParaRPr lang="en-US" sz="1000" dirty="0"/>
           </a:p>
@@ -4309,7 +4371,7 @@
         </p:nvSpPr>
         <p:spPr>
           <a:xfrm>
-            <a:off x="457200" y="3972560"/>
+            <a:off x="457200" y="3835400"/>
             <a:ext cx="8229600" cy="409448"/>
           </a:xfrm>
           <a:prstGeom prst="rect">
@@ -4319,13 +4381,6 @@
             <a:srgbClr val="E3F2FD"/>
           </a:solidFill>
           <a:ln/>
-          <a:effectLst>
-            <a:outerShdw sx="100000" sy="100000" kx="0" ky="0" algn="bl" rotWithShape="0" blurRad="50800" dist="25400" dir="8100000">
-              <a:srgbClr val="000000">
-                <a:alpha val="12000"/>
-              </a:srgbClr>
-            </a:outerShdw>
-          </a:effectLst>
         </p:spPr>
       </p:sp>
       <p:sp>
@@ -4336,7 +4391,7 @@
         </p:nvSpPr>
         <p:spPr>
           <a:xfrm>
-            <a:off x="457200" y="3972560"/>
+            <a:off x="457200" y="3835400"/>
             <a:ext cx="45720" cy="409448"/>
           </a:xfrm>
           <a:prstGeom prst="rect">
@@ -4356,8 +4411,8 @@
         </p:nvSpPr>
         <p:spPr>
           <a:xfrm>
-            <a:off x="685800" y="3972560"/>
-            <a:ext cx="7818120" cy="409448"/>
+            <a:off x="640080" y="3835400"/>
+            <a:ext cx="7863840" cy="409448"/>
           </a:xfrm>
           <a:prstGeom prst="rect">
             <a:avLst/>
@@ -4373,7 +4428,7 @@
               <a:buNone/>
             </a:pPr>
             <a:r>
-              <a:rPr lang="en-US" sz="1200" dirty="0">
+              <a:rPr lang="en-US" sz="1100" dirty="0">
                 <a:solidFill>
                   <a:srgbClr val="1A1A2E"/>
                 </a:solidFill>
@@ -4381,9 +4436,9 @@
                 <a:ea typeface="Calibri" pitchFamily="34" charset="-122"/>
                 <a:cs typeface="Calibri" pitchFamily="34" charset="-120"/>
               </a:rPr>
-              <a:t>SAVEPOINT point1;  -- point de retour intermédiaire</a:t>
-            </a:r>
-            <a:endParaRPr lang="en-US" sz="1200" dirty="0"/>
+              <a:t>SAVEPOINT point1; — point de retour intermediaire</a:t>
+            </a:r>
+            <a:endParaRPr lang="en-US" sz="1100" dirty="0"/>
           </a:p>
         </p:txBody>
       </p:sp>
@@ -4395,7 +4450,7 @@
         </p:nvSpPr>
         <p:spPr>
           <a:xfrm>
-            <a:off x="457200" y="4409440"/>
+            <a:off x="457200" y="4272280"/>
             <a:ext cx="8229600" cy="409448"/>
           </a:xfrm>
           <a:prstGeom prst="rect">
@@ -4405,13 +4460,6 @@
             <a:srgbClr val="FFFFFF"/>
           </a:solidFill>
           <a:ln/>
-          <a:effectLst>
-            <a:outerShdw sx="100000" sy="100000" kx="0" ky="0" algn="bl" rotWithShape="0" blurRad="50800" dist="25400" dir="8100000">
-              <a:srgbClr val="000000">
-                <a:alpha val="12000"/>
-              </a:srgbClr>
-            </a:outerShdw>
-          </a:effectLst>
         </p:spPr>
       </p:sp>
       <p:sp>
@@ -4422,7 +4470,7 @@
         </p:nvSpPr>
         <p:spPr>
           <a:xfrm>
-            <a:off x="457200" y="4409440"/>
+            <a:off x="457200" y="4272280"/>
             <a:ext cx="45720" cy="409448"/>
           </a:xfrm>
           <a:prstGeom prst="rect">
@@ -4442,8 +4490,8 @@
         </p:nvSpPr>
         <p:spPr>
           <a:xfrm>
-            <a:off x="685800" y="4409440"/>
-            <a:ext cx="7818120" cy="409448"/>
+            <a:off x="640080" y="4272280"/>
+            <a:ext cx="7863840" cy="409448"/>
           </a:xfrm>
           <a:prstGeom prst="rect">
             <a:avLst/>
@@ -4467,7 +4515,7 @@
                 <a:ea typeface="JetBrains Mono" pitchFamily="34" charset="-122"/>
                 <a:cs typeface="JetBrains Mono" pitchFamily="34" charset="-120"/>
               </a:rPr>
-              <a:t>ROLLBACK TO point1;  -- revenir à ce point uniquement</a:t>
+              <a:t>ROLLBACK TO point1; — revenir a ce point uniquement</a:t>
             </a:r>
             <a:endParaRPr lang="en-US" sz="1000" dirty="0"/>
           </a:p>
@@ -4534,7 +4582,7 @@
         <p:spPr>
           <a:xfrm>
             <a:off x="457200" y="182880"/>
-            <a:ext cx="8229600" cy="594360"/>
+            <a:ext cx="8229600" cy="502920"/>
           </a:xfrm>
           <a:prstGeom prst="rect">
             <a:avLst/>
@@ -4550,7 +4598,7 @@
               <a:buNone/>
             </a:pPr>
             <a:r>
-              <a:rPr lang="en-US" sz="2400" b="1" dirty="0">
+              <a:rPr lang="en-US" sz="2100" b="1" dirty="0">
                 <a:solidFill>
                   <a:srgbClr val="0D47A1"/>
                 </a:solidFill>
@@ -4558,9 +4606,9 @@
                 <a:ea typeface="Trebuchet MS" pitchFamily="34" charset="-122"/>
                 <a:cs typeface="Trebuchet MS" pitchFamily="34" charset="-120"/>
               </a:rPr>
-              <a:t>ACID — les 4 propriétés</a:t>
-            </a:r>
-            <a:endParaRPr lang="en-US" sz="2400" dirty="0"/>
+              <a:t>ACID — les 4 proprietes</a:t>
+            </a:r>
+            <a:endParaRPr lang="en-US" sz="2100" dirty="0"/>
           </a:p>
         </p:txBody>
       </p:sp>
@@ -4572,8 +4620,8 @@
         </p:nvSpPr>
         <p:spPr>
           <a:xfrm>
-            <a:off x="457200" y="914400"/>
-            <a:ext cx="8229600" cy="521208"/>
+            <a:off x="457200" y="777240"/>
+            <a:ext cx="8229600" cy="448056"/>
           </a:xfrm>
           <a:prstGeom prst="rect">
             <a:avLst/>
@@ -4582,13 +4630,6 @@
             <a:srgbClr val="FFFFFF"/>
           </a:solidFill>
           <a:ln/>
-          <a:effectLst>
-            <a:outerShdw sx="100000" sy="100000" kx="0" ky="0" algn="bl" rotWithShape="0" blurRad="50800" dist="25400" dir="8100000">
-              <a:srgbClr val="000000">
-                <a:alpha val="12000"/>
-              </a:srgbClr>
-            </a:outerShdw>
-          </a:effectLst>
         </p:spPr>
       </p:sp>
       <p:sp>
@@ -4599,8 +4640,8 @@
         </p:nvSpPr>
         <p:spPr>
           <a:xfrm>
-            <a:off x="457200" y="914400"/>
-            <a:ext cx="45720" cy="521208"/>
+            <a:off x="457200" y="777240"/>
+            <a:ext cx="45720" cy="448056"/>
           </a:xfrm>
           <a:prstGeom prst="rect">
             <a:avLst/>
@@ -4619,8 +4660,8 @@
         </p:nvSpPr>
         <p:spPr>
           <a:xfrm>
-            <a:off x="685800" y="914400"/>
-            <a:ext cx="7818120" cy="521208"/>
+            <a:off x="640080" y="777240"/>
+            <a:ext cx="7863840" cy="448056"/>
           </a:xfrm>
           <a:prstGeom prst="rect">
             <a:avLst/>
@@ -4636,7 +4677,7 @@
               <a:buNone/>
             </a:pPr>
             <a:r>
-              <a:rPr lang="en-US" sz="1200" dirty="0">
+              <a:rPr lang="en-US" sz="1100" dirty="0">
                 <a:solidFill>
                   <a:srgbClr val="1A1A2E"/>
                 </a:solidFill>
@@ -4644,9 +4685,9 @@
                 <a:ea typeface="Calibri" pitchFamily="34" charset="-122"/>
                 <a:cs typeface="Calibri" pitchFamily="34" charset="-120"/>
               </a:rPr>
-              <a:t>Atomicité : la transaction est TOUT OU RIEN (≠ atomicité 1NF !!!)</a:t>
-            </a:r>
-            <a:endParaRPr lang="en-US" sz="1200" dirty="0"/>
+              <a:t>Atomicite : la transaction est TOUT OU RIEN</a:t>
+            </a:r>
+            <a:endParaRPr lang="en-US" sz="1100" dirty="0"/>
           </a:p>
         </p:txBody>
       </p:sp>
@@ -4658,8 +4699,8 @@
         </p:nvSpPr>
         <p:spPr>
           <a:xfrm>
-            <a:off x="457200" y="1463040"/>
-            <a:ext cx="8229600" cy="521208"/>
+            <a:off x="457200" y="1252728"/>
+            <a:ext cx="8229600" cy="448056"/>
           </a:xfrm>
           <a:prstGeom prst="rect">
             <a:avLst/>
@@ -4668,13 +4709,6 @@
             <a:srgbClr val="E3F2FD"/>
           </a:solidFill>
           <a:ln/>
-          <a:effectLst>
-            <a:outerShdw sx="100000" sy="100000" kx="0" ky="0" algn="bl" rotWithShape="0" blurRad="50800" dist="25400" dir="8100000">
-              <a:srgbClr val="000000">
-                <a:alpha val="12000"/>
-              </a:srgbClr>
-            </a:outerShdw>
-          </a:effectLst>
         </p:spPr>
       </p:sp>
       <p:sp>
@@ -4685,8 +4719,8 @@
         </p:nvSpPr>
         <p:spPr>
           <a:xfrm>
-            <a:off x="457200" y="1463040"/>
-            <a:ext cx="45720" cy="521208"/>
+            <a:off x="457200" y="1252728"/>
+            <a:ext cx="45720" cy="448056"/>
           </a:xfrm>
           <a:prstGeom prst="rect">
             <a:avLst/>
@@ -4705,8 +4739,8 @@
         </p:nvSpPr>
         <p:spPr>
           <a:xfrm>
-            <a:off x="685800" y="1463040"/>
-            <a:ext cx="7818120" cy="521208"/>
+            <a:off x="640080" y="1252728"/>
+            <a:ext cx="7863840" cy="448056"/>
           </a:xfrm>
           <a:prstGeom prst="rect">
             <a:avLst/>
@@ -4722,7 +4756,7 @@
               <a:buNone/>
             </a:pPr>
             <a:r>
-              <a:rPr lang="en-US" sz="1200" dirty="0">
+              <a:rPr lang="en-US" sz="1100" dirty="0">
                 <a:solidFill>
                   <a:srgbClr val="1A1A2E"/>
                 </a:solidFill>
@@ -4730,9 +4764,9 @@
                 <a:ea typeface="Calibri" pitchFamily="34" charset="-122"/>
                 <a:cs typeface="Calibri" pitchFamily="34" charset="-120"/>
               </a:rPr>
-              <a:t>Cohérence : la BDD passe d'un état valide à un autre état valide</a:t>
-            </a:r>
-            <a:endParaRPr lang="en-US" sz="1200" dirty="0"/>
+              <a:t>  → ≠ atomicite 1NF !!! ACID = transaction, 1NF = cellule</a:t>
+            </a:r>
+            <a:endParaRPr lang="en-US" sz="1100" dirty="0"/>
           </a:p>
         </p:txBody>
       </p:sp>
@@ -4744,8 +4778,8 @@
         </p:nvSpPr>
         <p:spPr>
           <a:xfrm>
-            <a:off x="457200" y="2011680"/>
-            <a:ext cx="8229600" cy="521208"/>
+            <a:off x="457200" y="1728216"/>
+            <a:ext cx="8229600" cy="448056"/>
           </a:xfrm>
           <a:prstGeom prst="rect">
             <a:avLst/>
@@ -4754,13 +4788,6 @@
             <a:srgbClr val="FFFFFF"/>
           </a:solidFill>
           <a:ln/>
-          <a:effectLst>
-            <a:outerShdw sx="100000" sy="100000" kx="0" ky="0" algn="bl" rotWithShape="0" blurRad="50800" dist="25400" dir="8100000">
-              <a:srgbClr val="000000">
-                <a:alpha val="12000"/>
-              </a:srgbClr>
-            </a:outerShdw>
-          </a:effectLst>
         </p:spPr>
       </p:sp>
       <p:sp>
@@ -4771,8 +4798,8 @@
         </p:nvSpPr>
         <p:spPr>
           <a:xfrm>
-            <a:off x="457200" y="2011680"/>
-            <a:ext cx="45720" cy="521208"/>
+            <a:off x="457200" y="1728216"/>
+            <a:ext cx="45720" cy="448056"/>
           </a:xfrm>
           <a:prstGeom prst="rect">
             <a:avLst/>
@@ -4791,8 +4818,8 @@
         </p:nvSpPr>
         <p:spPr>
           <a:xfrm>
-            <a:off x="685800" y="2011680"/>
-            <a:ext cx="7818120" cy="521208"/>
+            <a:off x="640080" y="1728216"/>
+            <a:ext cx="7863840" cy="448056"/>
           </a:xfrm>
           <a:prstGeom prst="rect">
             <a:avLst/>
@@ -4808,7 +4835,86 @@
               <a:buNone/>
             </a:pPr>
             <a:r>
-              <a:rPr lang="en-US" sz="1200" dirty="0">
+              <a:rPr lang="en-US" sz="1100" dirty="0">
+                <a:solidFill>
+                  <a:srgbClr val="1A1A2E"/>
+                </a:solidFill>
+                <a:latin typeface="Calibri" pitchFamily="34" charset="0"/>
+                <a:ea typeface="Calibri" pitchFamily="34" charset="-122"/>
+                <a:cs typeface="Calibri" pitchFamily="34" charset="-120"/>
+              </a:rPr>
+              <a:t>Coherence : la BDD passe d'un etat valide a un autre etat valide</a:t>
+            </a:r>
+            <a:endParaRPr lang="en-US" sz="1100" dirty="0"/>
+          </a:p>
+        </p:txBody>
+      </p:sp>
+      <p:sp>
+        <p:nvSpPr>
+          <p:cNvPr id="13" name="Shape 11"/>
+          <p:cNvSpPr/>
+          <p:nvPr/>
+        </p:nvSpPr>
+        <p:spPr>
+          <a:xfrm>
+            <a:off x="457200" y="2203704"/>
+            <a:ext cx="8229600" cy="448056"/>
+          </a:xfrm>
+          <a:prstGeom prst="rect">
+            <a:avLst/>
+          </a:prstGeom>
+          <a:solidFill>
+            <a:srgbClr val="E3F2FD"/>
+          </a:solidFill>
+          <a:ln/>
+        </p:spPr>
+      </p:sp>
+      <p:sp>
+        <p:nvSpPr>
+          <p:cNvPr id="14" name="Shape 12"/>
+          <p:cNvSpPr/>
+          <p:nvPr/>
+        </p:nvSpPr>
+        <p:spPr>
+          <a:xfrm>
+            <a:off x="457200" y="2203704"/>
+            <a:ext cx="45720" cy="448056"/>
+          </a:xfrm>
+          <a:prstGeom prst="rect">
+            <a:avLst/>
+          </a:prstGeom>
+          <a:solidFill>
+            <a:srgbClr val="1565C0"/>
+          </a:solidFill>
+          <a:ln/>
+        </p:spPr>
+      </p:sp>
+      <p:sp>
+        <p:nvSpPr>
+          <p:cNvPr id="15" name="Text 13"/>
+          <p:cNvSpPr/>
+          <p:nvPr/>
+        </p:nvSpPr>
+        <p:spPr>
+          <a:xfrm>
+            <a:off x="640080" y="2203704"/>
+            <a:ext cx="7863840" cy="448056"/>
+          </a:xfrm>
+          <a:prstGeom prst="rect">
+            <a:avLst/>
+          </a:prstGeom>
+          <a:noFill/>
+          <a:ln/>
+        </p:spPr>
+        <p:txBody>
+          <a:bodyPr wrap="square" lIns="0" tIns="0" rIns="0" bIns="0" rtlCol="0" anchor="ctr"/>
+          <a:lstStyle/>
+          <a:p>
+            <a:pPr indent="0" marL="0">
+              <a:buNone/>
+            </a:pPr>
+            <a:r>
+              <a:rPr lang="en-US" sz="1100" dirty="0">
                 <a:solidFill>
                   <a:srgbClr val="1A1A2E"/>
                 </a:solidFill>
@@ -4818,47 +4924,40 @@
               </a:rPr>
               <a:t>Isolation : les transactions concurrentes ne se perturbent pas</a:t>
             </a:r>
-            <a:endParaRPr lang="en-US" sz="1200" dirty="0"/>
-          </a:p>
-        </p:txBody>
-      </p:sp>
-      <p:sp>
-        <p:nvSpPr>
-          <p:cNvPr id="13" name="Shape 11"/>
-          <p:cNvSpPr/>
-          <p:nvPr/>
-        </p:nvSpPr>
-        <p:spPr>
-          <a:xfrm>
-            <a:off x="457200" y="2560320"/>
-            <a:ext cx="8229600" cy="521208"/>
-          </a:xfrm>
-          <a:prstGeom prst="rect">
-            <a:avLst/>
-          </a:prstGeom>
-          <a:solidFill>
-            <a:srgbClr val="E3F2FD"/>
-          </a:solidFill>
-          <a:ln/>
-          <a:effectLst>
-            <a:outerShdw sx="100000" sy="100000" kx="0" ky="0" algn="bl" rotWithShape="0" blurRad="50800" dist="25400" dir="8100000">
-              <a:srgbClr val="000000">
-                <a:alpha val="12000"/>
-              </a:srgbClr>
-            </a:outerShdw>
-          </a:effectLst>
-        </p:spPr>
-      </p:sp>
-      <p:sp>
-        <p:nvSpPr>
-          <p:cNvPr id="14" name="Shape 12"/>
-          <p:cNvSpPr/>
-          <p:nvPr/>
-        </p:nvSpPr>
-        <p:spPr>
-          <a:xfrm>
-            <a:off x="457200" y="2560320"/>
-            <a:ext cx="45720" cy="521208"/>
+            <a:endParaRPr lang="en-US" sz="1100" dirty="0"/>
+          </a:p>
+        </p:txBody>
+      </p:sp>
+      <p:sp>
+        <p:nvSpPr>
+          <p:cNvPr id="16" name="Shape 14"/>
+          <p:cNvSpPr/>
+          <p:nvPr/>
+        </p:nvSpPr>
+        <p:spPr>
+          <a:xfrm>
+            <a:off x="457200" y="2679192"/>
+            <a:ext cx="8229600" cy="448056"/>
+          </a:xfrm>
+          <a:prstGeom prst="rect">
+            <a:avLst/>
+          </a:prstGeom>
+          <a:solidFill>
+            <a:srgbClr val="FFFFFF"/>
+          </a:solidFill>
+          <a:ln/>
+        </p:spPr>
+      </p:sp>
+      <p:sp>
+        <p:nvSpPr>
+          <p:cNvPr id="17" name="Shape 15"/>
+          <p:cNvSpPr/>
+          <p:nvPr/>
+        </p:nvSpPr>
+        <p:spPr>
+          <a:xfrm>
+            <a:off x="457200" y="2679192"/>
+            <a:ext cx="45720" cy="448056"/>
           </a:xfrm>
           <a:prstGeom prst="rect">
             <a:avLst/>
@@ -4871,14 +4970,14 @@
       </p:sp>
       <p:sp>
         <p:nvSpPr>
-          <p:cNvPr id="15" name="Text 13"/>
-          <p:cNvSpPr/>
-          <p:nvPr/>
-        </p:nvSpPr>
-        <p:spPr>
-          <a:xfrm>
-            <a:off x="685800" y="2560320"/>
-            <a:ext cx="7818120" cy="521208"/>
+          <p:cNvPr id="18" name="Text 16"/>
+          <p:cNvSpPr/>
+          <p:nvPr/>
+        </p:nvSpPr>
+        <p:spPr>
+          <a:xfrm>
+            <a:off x="640080" y="2679192"/>
+            <a:ext cx="7863840" cy="448056"/>
           </a:xfrm>
           <a:prstGeom prst="rect">
             <a:avLst/>
@@ -4894,7 +4993,7 @@
               <a:buNone/>
             </a:pPr>
             <a:r>
-              <a:rPr lang="en-US" sz="1200" dirty="0">
+              <a:rPr lang="en-US" sz="1100" dirty="0">
                 <a:solidFill>
                   <a:srgbClr val="1A1A2E"/>
                 </a:solidFill>
@@ -4902,49 +5001,42 @@
                 <a:ea typeface="Calibri" pitchFamily="34" charset="-122"/>
                 <a:cs typeface="Calibri" pitchFamily="34" charset="-120"/>
               </a:rPr>
-              <a:t>Durabilité : après COMMIT, les données survivent même à un crash</a:t>
-            </a:r>
-            <a:endParaRPr lang="en-US" sz="1200" dirty="0"/>
-          </a:p>
-        </p:txBody>
-      </p:sp>
-      <p:sp>
-        <p:nvSpPr>
-          <p:cNvPr id="16" name="Shape 14"/>
-          <p:cNvSpPr/>
-          <p:nvPr/>
-        </p:nvSpPr>
-        <p:spPr>
-          <a:xfrm>
-            <a:off x="457200" y="3108960"/>
-            <a:ext cx="8229600" cy="521208"/>
-          </a:xfrm>
-          <a:prstGeom prst="rect">
-            <a:avLst/>
-          </a:prstGeom>
-          <a:solidFill>
-            <a:srgbClr val="FFFFFF"/>
-          </a:solidFill>
-          <a:ln/>
-          <a:effectLst>
-            <a:outerShdw sx="100000" sy="100000" kx="0" ky="0" algn="bl" rotWithShape="0" blurRad="50800" dist="25400" dir="8100000">
-              <a:srgbClr val="000000">
-                <a:alpha val="12000"/>
-              </a:srgbClr>
-            </a:outerShdw>
-          </a:effectLst>
-        </p:spPr>
-      </p:sp>
-      <p:sp>
-        <p:nvSpPr>
-          <p:cNvPr id="17" name="Shape 15"/>
-          <p:cNvSpPr/>
-          <p:nvPr/>
-        </p:nvSpPr>
-        <p:spPr>
-          <a:xfrm>
-            <a:off x="457200" y="3108960"/>
-            <a:ext cx="45720" cy="521208"/>
+              <a:t>Durabilite : apres COMMIT, les donnees survivent meme a un crash</a:t>
+            </a:r>
+            <a:endParaRPr lang="en-US" sz="1100" dirty="0"/>
+          </a:p>
+        </p:txBody>
+      </p:sp>
+      <p:sp>
+        <p:nvSpPr>
+          <p:cNvPr id="19" name="Shape 17"/>
+          <p:cNvSpPr/>
+          <p:nvPr/>
+        </p:nvSpPr>
+        <p:spPr>
+          <a:xfrm>
+            <a:off x="457200" y="3154680"/>
+            <a:ext cx="8229600" cy="448056"/>
+          </a:xfrm>
+          <a:prstGeom prst="rect">
+            <a:avLst/>
+          </a:prstGeom>
+          <a:solidFill>
+            <a:srgbClr val="E3F2FD"/>
+          </a:solidFill>
+          <a:ln/>
+        </p:spPr>
+      </p:sp>
+      <p:sp>
+        <p:nvSpPr>
+          <p:cNvPr id="20" name="Shape 18"/>
+          <p:cNvSpPr/>
+          <p:nvPr/>
+        </p:nvSpPr>
+        <p:spPr>
+          <a:xfrm>
+            <a:off x="457200" y="3154680"/>
+            <a:ext cx="45720" cy="448056"/>
           </a:xfrm>
           <a:prstGeom prst="rect">
             <a:avLst/>
@@ -4957,14 +5049,14 @@
       </p:sp>
       <p:sp>
         <p:nvSpPr>
-          <p:cNvPr id="18" name="Text 16"/>
-          <p:cNvSpPr/>
-          <p:nvPr/>
-        </p:nvSpPr>
-        <p:spPr>
-          <a:xfrm>
-            <a:off x="685800" y="3108960"/>
-            <a:ext cx="7818120" cy="521208"/>
+          <p:cNvPr id="21" name="Text 19"/>
+          <p:cNvSpPr/>
+          <p:nvPr/>
+        </p:nvSpPr>
+        <p:spPr>
+          <a:xfrm>
+            <a:off x="640080" y="3154680"/>
+            <a:ext cx="7863840" cy="448056"/>
           </a:xfrm>
           <a:prstGeom prst="rect">
             <a:avLst/>
@@ -4980,7 +5072,7 @@
               <a:buNone/>
             </a:pPr>
             <a:r>
-              <a:rPr lang="en-US" sz="1200" dirty="0">
+              <a:rPr lang="en-US" sz="1100" dirty="0">
                 <a:solidFill>
                   <a:srgbClr val="1A1A2E"/>
                 </a:solidFill>
@@ -4988,49 +5080,42 @@
                 <a:ea typeface="Calibri" pitchFamily="34" charset="-122"/>
                 <a:cs typeface="Calibri" pitchFamily="34" charset="-120"/>
               </a:rPr>
-              <a:t>⚠️ PIÈGE CLASSIQUE : atomicité ACID ≠ atomicité 1NF</a:t>
-            </a:r>
-            <a:endParaRPr lang="en-US" sz="1200" dirty="0"/>
-          </a:p>
-        </p:txBody>
-      </p:sp>
-      <p:sp>
-        <p:nvSpPr>
-          <p:cNvPr id="19" name="Shape 17"/>
-          <p:cNvSpPr/>
-          <p:nvPr/>
-        </p:nvSpPr>
-        <p:spPr>
-          <a:xfrm>
-            <a:off x="457200" y="3657600"/>
-            <a:ext cx="8229600" cy="521208"/>
-          </a:xfrm>
-          <a:prstGeom prst="rect">
-            <a:avLst/>
-          </a:prstGeom>
-          <a:solidFill>
-            <a:srgbClr val="E3F2FD"/>
-          </a:solidFill>
-          <a:ln/>
-          <a:effectLst>
-            <a:outerShdw sx="100000" sy="100000" kx="0" ky="0" algn="bl" rotWithShape="0" blurRad="50800" dist="25400" dir="8100000">
-              <a:srgbClr val="000000">
-                <a:alpha val="12000"/>
-              </a:srgbClr>
-            </a:outerShdw>
-          </a:effectLst>
-        </p:spPr>
-      </p:sp>
-      <p:sp>
-        <p:nvSpPr>
-          <p:cNvPr id="20" name="Shape 18"/>
-          <p:cNvSpPr/>
-          <p:nvPr/>
-        </p:nvSpPr>
-        <p:spPr>
-          <a:xfrm>
-            <a:off x="457200" y="3657600"/>
-            <a:ext cx="45720" cy="521208"/>
+              <a:t>Mnemonique : A-C-I-D = 'Acide' pour la fiabilite</a:t>
+            </a:r>
+            <a:endParaRPr lang="en-US" sz="1100" dirty="0"/>
+          </a:p>
+        </p:txBody>
+      </p:sp>
+      <p:sp>
+        <p:nvSpPr>
+          <p:cNvPr id="22" name="Shape 20"/>
+          <p:cNvSpPr/>
+          <p:nvPr/>
+        </p:nvSpPr>
+        <p:spPr>
+          <a:xfrm>
+            <a:off x="457200" y="3630168"/>
+            <a:ext cx="8229600" cy="448056"/>
+          </a:xfrm>
+          <a:prstGeom prst="rect">
+            <a:avLst/>
+          </a:prstGeom>
+          <a:solidFill>
+            <a:srgbClr val="FFFFFF"/>
+          </a:solidFill>
+          <a:ln/>
+        </p:spPr>
+      </p:sp>
+      <p:sp>
+        <p:nvSpPr>
+          <p:cNvPr id="23" name="Shape 21"/>
+          <p:cNvSpPr/>
+          <p:nvPr/>
+        </p:nvSpPr>
+        <p:spPr>
+          <a:xfrm>
+            <a:off x="457200" y="3630168"/>
+            <a:ext cx="45720" cy="448056"/>
           </a:xfrm>
           <a:prstGeom prst="rect">
             <a:avLst/>
@@ -5043,14 +5128,14 @@
       </p:sp>
       <p:sp>
         <p:nvSpPr>
-          <p:cNvPr id="21" name="Text 19"/>
-          <p:cNvSpPr/>
-          <p:nvPr/>
-        </p:nvSpPr>
-        <p:spPr>
-          <a:xfrm>
-            <a:off x="685800" y="3657600"/>
-            <a:ext cx="7818120" cy="521208"/>
+          <p:cNvPr id="24" name="Text 22"/>
+          <p:cNvSpPr/>
+          <p:nvPr/>
+        </p:nvSpPr>
+        <p:spPr>
+          <a:xfrm>
+            <a:off x="640080" y="3630168"/>
+            <a:ext cx="7863840" cy="448056"/>
           </a:xfrm>
           <a:prstGeom prst="rect">
             <a:avLst/>
@@ -5066,7 +5151,7 @@
               <a:buNone/>
             </a:pPr>
             <a:r>
-              <a:rPr lang="en-US" sz="1200" dirty="0">
+              <a:rPr lang="en-US" sz="1100" dirty="0">
                 <a:solidFill>
                   <a:srgbClr val="1A1A2E"/>
                 </a:solidFill>
@@ -5074,95 +5159,9 @@
                 <a:ea typeface="Calibri" pitchFamily="34" charset="-122"/>
                 <a:cs typeface="Calibri" pitchFamily="34" charset="-120"/>
               </a:rPr>
-              <a:t>ACID = transaction complète ou annulée | 1NF = valeur indivisible dans cellule</a:t>
-            </a:r>
-            <a:endParaRPr lang="en-US" sz="1200" dirty="0"/>
-          </a:p>
-        </p:txBody>
-      </p:sp>
-      <p:sp>
-        <p:nvSpPr>
-          <p:cNvPr id="22" name="Shape 20"/>
-          <p:cNvSpPr/>
-          <p:nvPr/>
-        </p:nvSpPr>
-        <p:spPr>
-          <a:xfrm>
-            <a:off x="457200" y="4206240"/>
-            <a:ext cx="8229600" cy="521208"/>
-          </a:xfrm>
-          <a:prstGeom prst="rect">
-            <a:avLst/>
-          </a:prstGeom>
-          <a:solidFill>
-            <a:srgbClr val="FFFFFF"/>
-          </a:solidFill>
-          <a:ln/>
-          <a:effectLst>
-            <a:outerShdw sx="100000" sy="100000" kx="0" ky="0" algn="bl" rotWithShape="0" blurRad="50800" dist="25400" dir="8100000">
-              <a:srgbClr val="000000">
-                <a:alpha val="12000"/>
-              </a:srgbClr>
-            </a:outerShdw>
-          </a:effectLst>
-        </p:spPr>
-      </p:sp>
-      <p:sp>
-        <p:nvSpPr>
-          <p:cNvPr id="23" name="Shape 21"/>
-          <p:cNvSpPr/>
-          <p:nvPr/>
-        </p:nvSpPr>
-        <p:spPr>
-          <a:xfrm>
-            <a:off x="457200" y="4206240"/>
-            <a:ext cx="45720" cy="521208"/>
-          </a:xfrm>
-          <a:prstGeom prst="rect">
-            <a:avLst/>
-          </a:prstGeom>
-          <a:solidFill>
-            <a:srgbClr val="1565C0"/>
-          </a:solidFill>
-          <a:ln/>
-        </p:spPr>
-      </p:sp>
-      <p:sp>
-        <p:nvSpPr>
-          <p:cNvPr id="24" name="Text 22"/>
-          <p:cNvSpPr/>
-          <p:nvPr/>
-        </p:nvSpPr>
-        <p:spPr>
-          <a:xfrm>
-            <a:off x="685800" y="4206240"/>
-            <a:ext cx="7818120" cy="521208"/>
-          </a:xfrm>
-          <a:prstGeom prst="rect">
-            <a:avLst/>
-          </a:prstGeom>
-          <a:noFill/>
-          <a:ln/>
-        </p:spPr>
-        <p:txBody>
-          <a:bodyPr wrap="square" lIns="0" tIns="0" rIns="0" bIns="0" rtlCol="0" anchor="ctr"/>
-          <a:lstStyle/>
-          <a:p>
-            <a:pPr indent="0" marL="0">
-              <a:buNone/>
-            </a:pPr>
-            <a:r>
-              <a:rPr lang="en-US" sz="1200" dirty="0">
-                <a:solidFill>
-                  <a:srgbClr val="1A1A2E"/>
-                </a:solidFill>
-                <a:latin typeface="Calibri" pitchFamily="34" charset="0"/>
-                <a:ea typeface="Calibri" pitchFamily="34" charset="-122"/>
-                <a:cs typeface="Calibri" pitchFamily="34" charset="-120"/>
-              </a:rPr>
-              <a:t>Ce sont DEUX concepts DIFFÉRENTS avec le même nom !</a:t>
-            </a:r>
-            <a:endParaRPr lang="en-US" sz="1200" dirty="0"/>
+              <a:t>Tous les SGBD relationnels supportent ACID (avantage vs NoSQL)</a:t>
+            </a:r>
+            <a:endParaRPr lang="en-US" sz="1100" dirty="0"/>
           </a:p>
         </p:txBody>
       </p:sp>
@@ -5227,7 +5226,7 @@
         <p:spPr>
           <a:xfrm>
             <a:off x="457200" y="182880"/>
-            <a:ext cx="8229600" cy="594360"/>
+            <a:ext cx="8229600" cy="502920"/>
           </a:xfrm>
           <a:prstGeom prst="rect">
             <a:avLst/>
@@ -5243,7 +5242,7 @@
               <a:buNone/>
             </a:pPr>
             <a:r>
-              <a:rPr lang="en-US" sz="2400" b="1" dirty="0">
+              <a:rPr lang="en-US" sz="2100" b="1" dirty="0">
                 <a:solidFill>
                   <a:srgbClr val="0D47A1"/>
                 </a:solidFill>
@@ -5251,9 +5250,9 @@
                 <a:ea typeface="Trebuchet MS" pitchFamily="34" charset="-122"/>
                 <a:cs typeface="Trebuchet MS" pitchFamily="34" charset="-120"/>
               </a:rPr>
-              <a:t>Exercice Module 11</a:t>
-            </a:r>
-            <a:endParaRPr lang="en-US" sz="2400" dirty="0"/>
+              <a:t>Exercices GESCOM lies</a:t>
+            </a:r>
+            <a:endParaRPr lang="en-US" sz="2100" dirty="0"/>
           </a:p>
         </p:txBody>
       </p:sp>
@@ -5265,8 +5264,8 @@
         </p:nvSpPr>
         <p:spPr>
           <a:xfrm>
-            <a:off x="457200" y="914400"/>
-            <a:ext cx="8229600" cy="521208"/>
+            <a:off x="457200" y="777240"/>
+            <a:ext cx="8229600" cy="448056"/>
           </a:xfrm>
           <a:prstGeom prst="rect">
             <a:avLst/>
@@ -5275,13 +5274,6 @@
             <a:srgbClr val="FFFFFF"/>
           </a:solidFill>
           <a:ln/>
-          <a:effectLst>
-            <a:outerShdw sx="100000" sy="100000" kx="0" ky="0" algn="bl" rotWithShape="0" blurRad="50800" dist="25400" dir="8100000">
-              <a:srgbClr val="000000">
-                <a:alpha val="12000"/>
-              </a:srgbClr>
-            </a:outerShdw>
-          </a:effectLst>
         </p:spPr>
       </p:sp>
       <p:sp>
@@ -5292,8 +5284,8 @@
         </p:nvSpPr>
         <p:spPr>
           <a:xfrm>
-            <a:off x="457200" y="914400"/>
-            <a:ext cx="45720" cy="521208"/>
+            <a:off x="457200" y="777240"/>
+            <a:ext cx="45720" cy="448056"/>
           </a:xfrm>
           <a:prstGeom prst="rect">
             <a:avLst/>
@@ -5312,8 +5304,8 @@
         </p:nvSpPr>
         <p:spPr>
           <a:xfrm>
-            <a:off x="685800" y="914400"/>
-            <a:ext cx="7818120" cy="521208"/>
+            <a:off x="640080" y="777240"/>
+            <a:ext cx="7863840" cy="448056"/>
           </a:xfrm>
           <a:prstGeom prst="rect">
             <a:avLst/>
@@ -5329,7 +5321,7 @@
               <a:buNone/>
             </a:pPr>
             <a:r>
-              <a:rPr lang="en-US" sz="1200" dirty="0">
+              <a:rPr lang="en-US" sz="1100" dirty="0">
                 <a:solidFill>
                   <a:srgbClr val="1A1A2E"/>
                 </a:solidFill>
@@ -5337,9 +5329,9 @@
                 <a:ea typeface="Calibri" pitchFamily="34" charset="-122"/>
                 <a:cs typeface="Calibri" pitchFamily="34" charset="-120"/>
               </a:rPr>
-              <a:t>Exécuter le script sql/01_insert_data.sql dans HeidiSQL</a:t>
-            </a:r>
-            <a:endParaRPr lang="en-US" sz="1200" dirty="0"/>
+              <a:t>Exercice GESCOM #19 : INSERT client (NOCLI=700, 'TEST', ZURICH)</a:t>
+            </a:r>
+            <a:endParaRPr lang="en-US" sz="1100" dirty="0"/>
           </a:p>
         </p:txBody>
       </p:sp>
@@ -5351,8 +5343,8 @@
         </p:nvSpPr>
         <p:spPr>
           <a:xfrm>
-            <a:off x="457200" y="1463040"/>
-            <a:ext cx="8229600" cy="521208"/>
+            <a:off x="457200" y="1252728"/>
+            <a:ext cx="8229600" cy="448056"/>
           </a:xfrm>
           <a:prstGeom prst="rect">
             <a:avLst/>
@@ -5361,13 +5353,6 @@
             <a:srgbClr val="E3F2FD"/>
           </a:solidFill>
           <a:ln/>
-          <a:effectLst>
-            <a:outerShdw sx="100000" sy="100000" kx="0" ky="0" algn="bl" rotWithShape="0" blurRad="50800" dist="25400" dir="8100000">
-              <a:srgbClr val="000000">
-                <a:alpha val="12000"/>
-              </a:srgbClr>
-            </a:outerShdw>
-          </a:effectLst>
         </p:spPr>
       </p:sp>
       <p:sp>
@@ -5378,8 +5363,8 @@
         </p:nvSpPr>
         <p:spPr>
           <a:xfrm>
-            <a:off x="457200" y="1463040"/>
-            <a:ext cx="45720" cy="521208"/>
+            <a:off x="457200" y="1252728"/>
+            <a:ext cx="45720" cy="448056"/>
           </a:xfrm>
           <a:prstGeom prst="rect">
             <a:avLst/>
@@ -5398,8 +5383,8 @@
         </p:nvSpPr>
         <p:spPr>
           <a:xfrm>
-            <a:off x="685800" y="1463040"/>
-            <a:ext cx="7818120" cy="521208"/>
+            <a:off x="640080" y="1252728"/>
+            <a:ext cx="7863840" cy="448056"/>
           </a:xfrm>
           <a:prstGeom prst="rect">
             <a:avLst/>
@@ -5415,7 +5400,7 @@
               <a:buNone/>
             </a:pPr>
             <a:r>
-              <a:rPr lang="en-US" sz="1200" dirty="0">
+              <a:rPr lang="en-US" sz="1100" dirty="0">
                 <a:solidFill>
                   <a:srgbClr val="1A1A2E"/>
                 </a:solidFill>
@@ -5423,9 +5408,9 @@
                 <a:ea typeface="Calibri" pitchFamily="34" charset="-122"/>
                 <a:cs typeface="Calibri" pitchFamily="34" charset="-120"/>
               </a:rPr>
-              <a:t>Écrire 5 UPDATE ciblés (modifier email, changer statut, augmenter tarif...)</a:t>
-            </a:r>
-            <a:endParaRPr lang="en-US" sz="1200" dirty="0"/>
+              <a:t>Exercice GESCOM #20 : UPDATE article, augmenter CA de 10% (four. 80)</a:t>
+            </a:r>
+            <a:endParaRPr lang="en-US" sz="1100" dirty="0"/>
           </a:p>
         </p:txBody>
       </p:sp>
@@ -5437,8 +5422,8 @@
         </p:nvSpPr>
         <p:spPr>
           <a:xfrm>
-            <a:off x="457200" y="2011680"/>
-            <a:ext cx="8229600" cy="521208"/>
+            <a:off x="457200" y="1728216"/>
+            <a:ext cx="8229600" cy="448056"/>
           </a:xfrm>
           <a:prstGeom prst="rect">
             <a:avLst/>
@@ -5447,13 +5432,6 @@
             <a:srgbClr val="FFFFFF"/>
           </a:solidFill>
           <a:ln/>
-          <a:effectLst>
-            <a:outerShdw sx="100000" sy="100000" kx="0" ky="0" algn="bl" rotWithShape="0" blurRad="50800" dist="25400" dir="8100000">
-              <a:srgbClr val="000000">
-                <a:alpha val="12000"/>
-              </a:srgbClr>
-            </a:outerShdw>
-          </a:effectLst>
         </p:spPr>
       </p:sp>
       <p:sp>
@@ -5464,8 +5442,8 @@
         </p:nvSpPr>
         <p:spPr>
           <a:xfrm>
-            <a:off x="457200" y="2011680"/>
-            <a:ext cx="45720" cy="521208"/>
+            <a:off x="457200" y="1728216"/>
+            <a:ext cx="45720" cy="448056"/>
           </a:xfrm>
           <a:prstGeom prst="rect">
             <a:avLst/>
@@ -5484,8 +5462,8 @@
         </p:nvSpPr>
         <p:spPr>
           <a:xfrm>
-            <a:off x="685800" y="2011680"/>
-            <a:ext cx="7818120" cy="521208"/>
+            <a:off x="640080" y="1728216"/>
+            <a:ext cx="7863840" cy="448056"/>
           </a:xfrm>
           <a:prstGeom prst="rect">
             <a:avLst/>
@@ -5501,7 +5479,7 @@
               <a:buNone/>
             </a:pPr>
             <a:r>
-              <a:rPr lang="en-US" sz="1200" dirty="0">
+              <a:rPr lang="en-US" sz="1100" dirty="0">
                 <a:solidFill>
                   <a:srgbClr val="1A1A2E"/>
                 </a:solidFill>
@@ -5509,9 +5487,9 @@
                 <a:ea typeface="Calibri" pitchFamily="34" charset="-122"/>
                 <a:cs typeface="Calibri" pitchFamily="34" charset="-120"/>
               </a:rPr>
-              <a:t>Écrire 3 DELETE ciblés avec vérification SELECT avant</a:t>
-            </a:r>
-            <a:endParaRPr lang="en-US" sz="1200" dirty="0"/>
+              <a:t>Exercice GESCOM #21 : DELETE client TEST qu'on vient d'inserer</a:t>
+            </a:r>
+            <a:endParaRPr lang="en-US" sz="1100" dirty="0"/>
           </a:p>
         </p:txBody>
       </p:sp>
@@ -5523,8 +5501,8 @@
         </p:nvSpPr>
         <p:spPr>
           <a:xfrm>
-            <a:off x="457200" y="2560320"/>
-            <a:ext cx="8229600" cy="521208"/>
+            <a:off x="457200" y="2203704"/>
+            <a:ext cx="8229600" cy="448056"/>
           </a:xfrm>
           <a:prstGeom prst="rect">
             <a:avLst/>
@@ -5533,13 +5511,6 @@
             <a:srgbClr val="E3F2FD"/>
           </a:solidFill>
           <a:ln/>
-          <a:effectLst>
-            <a:outerShdw sx="100000" sy="100000" kx="0" ky="0" algn="bl" rotWithShape="0" blurRad="50800" dist="25400" dir="8100000">
-              <a:srgbClr val="000000">
-                <a:alpha val="12000"/>
-              </a:srgbClr>
-            </a:outerShdw>
-          </a:effectLst>
         </p:spPr>
       </p:sp>
       <p:sp>
@@ -5550,8 +5521,8 @@
         </p:nvSpPr>
         <p:spPr>
           <a:xfrm>
-            <a:off x="457200" y="2560320"/>
-            <a:ext cx="45720" cy="521208"/>
+            <a:off x="457200" y="2203704"/>
+            <a:ext cx="45720" cy="448056"/>
           </a:xfrm>
           <a:prstGeom prst="rect">
             <a:avLst/>
@@ -5570,8 +5541,8 @@
         </p:nvSpPr>
         <p:spPr>
           <a:xfrm>
-            <a:off x="685800" y="2560320"/>
-            <a:ext cx="7818120" cy="521208"/>
+            <a:off x="640080" y="2203704"/>
+            <a:ext cx="7863840" cy="448056"/>
           </a:xfrm>
           <a:prstGeom prst="rect">
             <a:avLst/>
@@ -5587,7 +5558,7 @@
               <a:buNone/>
             </a:pPr>
             <a:r>
-              <a:rPr lang="en-US" sz="1200" dirty="0">
+              <a:rPr lang="en-US" sz="1100" dirty="0">
                 <a:solidFill>
                   <a:srgbClr val="1A1A2E"/>
                 </a:solidFill>
@@ -5595,9 +5566,9 @@
                 <a:ea typeface="Calibri" pitchFamily="34" charset="-122"/>
                 <a:cs typeface="Calibri" pitchFamily="34" charset="-120"/>
               </a:rPr>
-              <a:t>Utiliser BEGIN/COMMIT pour grouper 3 modifications</a:t>
-            </a:r>
-            <a:endParaRPr lang="en-US" sz="1200" dirty="0"/>
+              <a:t>Sur SwissSound :</a:t>
+            </a:r>
+            <a:endParaRPr lang="en-US" sz="1100" dirty="0"/>
           </a:p>
         </p:txBody>
       </p:sp>
@@ -5609,8 +5580,8 @@
         </p:nvSpPr>
         <p:spPr>
           <a:xfrm>
-            <a:off x="457200" y="3108960"/>
-            <a:ext cx="8229600" cy="521208"/>
+            <a:off x="457200" y="2679192"/>
+            <a:ext cx="8229600" cy="448056"/>
           </a:xfrm>
           <a:prstGeom prst="rect">
             <a:avLst/>
@@ -5619,13 +5590,6 @@
             <a:srgbClr val="FFFFFF"/>
           </a:solidFill>
           <a:ln/>
-          <a:effectLst>
-            <a:outerShdw sx="100000" sy="100000" kx="0" ky="0" algn="bl" rotWithShape="0" blurRad="50800" dist="25400" dir="8100000">
-              <a:srgbClr val="000000">
-                <a:alpha val="12000"/>
-              </a:srgbClr>
-            </a:outerShdw>
-          </a:effectLst>
         </p:spPr>
       </p:sp>
       <p:sp>
@@ -5636,8 +5600,8 @@
         </p:nvSpPr>
         <p:spPr>
           <a:xfrm>
-            <a:off x="457200" y="3108960"/>
-            <a:ext cx="45720" cy="521208"/>
+            <a:off x="457200" y="2679192"/>
+            <a:ext cx="45720" cy="448056"/>
           </a:xfrm>
           <a:prstGeom prst="rect">
             <a:avLst/>
@@ -5656,8 +5620,8 @@
         </p:nvSpPr>
         <p:spPr>
           <a:xfrm>
-            <a:off x="685800" y="3108960"/>
-            <a:ext cx="7818120" cy="521208"/>
+            <a:off x="640080" y="2679192"/>
+            <a:ext cx="7863840" cy="448056"/>
           </a:xfrm>
           <a:prstGeom prst="rect">
             <a:avLst/>
@@ -5673,7 +5637,86 @@
               <a:buNone/>
             </a:pPr>
             <a:r>
-              <a:rPr lang="en-US" sz="1200" dirty="0">
+              <a:rPr lang="en-US" sz="1000" dirty="0">
+                <a:solidFill>
+                  <a:srgbClr val="0D47A1"/>
+                </a:solidFill>
+                <a:latin typeface="JetBrains Mono" pitchFamily="34" charset="0"/>
+                <a:ea typeface="JetBrains Mono" pitchFamily="34" charset="-122"/>
+                <a:cs typeface="JetBrains Mono" pitchFamily="34" charset="-120"/>
+              </a:rPr>
+              <a:t>  INSERT 5 artistes avec donnees suisses</a:t>
+            </a:r>
+            <a:endParaRPr lang="en-US" sz="1000" dirty="0"/>
+          </a:p>
+        </p:txBody>
+      </p:sp>
+      <p:sp>
+        <p:nvSpPr>
+          <p:cNvPr id="19" name="Shape 17"/>
+          <p:cNvSpPr/>
+          <p:nvPr/>
+        </p:nvSpPr>
+        <p:spPr>
+          <a:xfrm>
+            <a:off x="457200" y="3154680"/>
+            <a:ext cx="8229600" cy="448056"/>
+          </a:xfrm>
+          <a:prstGeom prst="rect">
+            <a:avLst/>
+          </a:prstGeom>
+          <a:solidFill>
+            <a:srgbClr val="E3F2FD"/>
+          </a:solidFill>
+          <a:ln/>
+        </p:spPr>
+      </p:sp>
+      <p:sp>
+        <p:nvSpPr>
+          <p:cNvPr id="20" name="Shape 18"/>
+          <p:cNvSpPr/>
+          <p:nvPr/>
+        </p:nvSpPr>
+        <p:spPr>
+          <a:xfrm>
+            <a:off x="457200" y="3154680"/>
+            <a:ext cx="45720" cy="448056"/>
+          </a:xfrm>
+          <a:prstGeom prst="rect">
+            <a:avLst/>
+          </a:prstGeom>
+          <a:solidFill>
+            <a:srgbClr val="1565C0"/>
+          </a:solidFill>
+          <a:ln/>
+        </p:spPr>
+      </p:sp>
+      <p:sp>
+        <p:nvSpPr>
+          <p:cNvPr id="21" name="Text 19"/>
+          <p:cNvSpPr/>
+          <p:nvPr/>
+        </p:nvSpPr>
+        <p:spPr>
+          <a:xfrm>
+            <a:off x="640080" y="3154680"/>
+            <a:ext cx="7863840" cy="448056"/>
+          </a:xfrm>
+          <a:prstGeom prst="rect">
+            <a:avLst/>
+          </a:prstGeom>
+          <a:noFill/>
+          <a:ln/>
+        </p:spPr>
+        <p:txBody>
+          <a:bodyPr wrap="square" lIns="0" tIns="0" rIns="0" bIns="0" rtlCol="0" anchor="ctr"/>
+          <a:lstStyle/>
+          <a:p>
+            <a:pPr indent="0" marL="0">
+              <a:buNone/>
+            </a:pPr>
+            <a:r>
+              <a:rPr lang="en-US" sz="1100" dirty="0">
                 <a:solidFill>
                   <a:srgbClr val="1A1A2E"/>
                 </a:solidFill>
@@ -5681,49 +5724,42 @@
                 <a:ea typeface="Calibri" pitchFamily="34" charset="-122"/>
                 <a:cs typeface="Calibri" pitchFamily="34" charset="-120"/>
               </a:rPr>
-              <a:t>Simuler un crash : BEGIN → modifications → ROLLBACK → vérifier</a:t>
-            </a:r>
-            <a:endParaRPr lang="en-US" sz="1200" dirty="0"/>
-          </a:p>
-        </p:txBody>
-      </p:sp>
-      <p:sp>
-        <p:nvSpPr>
-          <p:cNvPr id="19" name="Shape 17"/>
-          <p:cNvSpPr/>
-          <p:nvPr/>
-        </p:nvSpPr>
-        <p:spPr>
-          <a:xfrm>
-            <a:off x="457200" y="3657600"/>
-            <a:ext cx="8229600" cy="521208"/>
-          </a:xfrm>
-          <a:prstGeom prst="rect">
-            <a:avLst/>
-          </a:prstGeom>
-          <a:solidFill>
-            <a:srgbClr val="E3F2FD"/>
-          </a:solidFill>
-          <a:ln/>
-          <a:effectLst>
-            <a:outerShdw sx="100000" sy="100000" kx="0" ky="0" algn="bl" rotWithShape="0" blurRad="50800" dist="25400" dir="8100000">
-              <a:srgbClr val="000000">
-                <a:alpha val="12000"/>
-              </a:srgbClr>
-            </a:outerShdw>
-          </a:effectLst>
-        </p:spPr>
-      </p:sp>
-      <p:sp>
-        <p:nvSpPr>
-          <p:cNvPr id="20" name="Shape 18"/>
-          <p:cNvSpPr/>
-          <p:nvPr/>
-        </p:nvSpPr>
-        <p:spPr>
-          <a:xfrm>
-            <a:off x="457200" y="3657600"/>
-            <a:ext cx="45720" cy="521208"/>
+              <a:t>  UPDATE email d'un artiste (avec SELECT avant !)</a:t>
+            </a:r>
+            <a:endParaRPr lang="en-US" sz="1100" dirty="0"/>
+          </a:p>
+        </p:txBody>
+      </p:sp>
+      <p:sp>
+        <p:nvSpPr>
+          <p:cNvPr id="22" name="Shape 20"/>
+          <p:cNvSpPr/>
+          <p:nvPr/>
+        </p:nvSpPr>
+        <p:spPr>
+          <a:xfrm>
+            <a:off x="457200" y="3630168"/>
+            <a:ext cx="8229600" cy="448056"/>
+          </a:xfrm>
+          <a:prstGeom prst="rect">
+            <a:avLst/>
+          </a:prstGeom>
+          <a:solidFill>
+            <a:srgbClr val="FFFFFF"/>
+          </a:solidFill>
+          <a:ln/>
+        </p:spPr>
+      </p:sp>
+      <p:sp>
+        <p:nvSpPr>
+          <p:cNvPr id="23" name="Shape 21"/>
+          <p:cNvSpPr/>
+          <p:nvPr/>
+        </p:nvSpPr>
+        <p:spPr>
+          <a:xfrm>
+            <a:off x="457200" y="3630168"/>
+            <a:ext cx="45720" cy="448056"/>
           </a:xfrm>
           <a:prstGeom prst="rect">
             <a:avLst/>
@@ -5736,14 +5772,14 @@
       </p:sp>
       <p:sp>
         <p:nvSpPr>
-          <p:cNvPr id="21" name="Text 19"/>
-          <p:cNvSpPr/>
-          <p:nvPr/>
-        </p:nvSpPr>
-        <p:spPr>
-          <a:xfrm>
-            <a:off x="685800" y="3657600"/>
-            <a:ext cx="7818120" cy="521208"/>
+          <p:cNvPr id="24" name="Text 22"/>
+          <p:cNvSpPr/>
+          <p:nvPr/>
+        </p:nvSpPr>
+        <p:spPr>
+          <a:xfrm>
+            <a:off x="640080" y="3630168"/>
+            <a:ext cx="7863840" cy="448056"/>
           </a:xfrm>
           <a:prstGeom prst="rect">
             <a:avLst/>
@@ -5759,7 +5795,7 @@
               <a:buNone/>
             </a:pPr>
             <a:r>
-              <a:rPr lang="en-US" sz="1200" dirty="0">
+              <a:rPr lang="en-US" sz="1100" dirty="0">
                 <a:solidFill>
                   <a:srgbClr val="1A1A2E"/>
                 </a:solidFill>
@@ -5767,9 +5803,88 @@
                 <a:ea typeface="Calibri" pitchFamily="34" charset="-122"/>
                 <a:cs typeface="Calibri" pitchFamily="34" charset="-120"/>
               </a:rPr>
-              <a:t>DÉFI : utiliser SAVEPOINT pour un rollback partiel</a:t>
-            </a:r>
-            <a:endParaRPr lang="en-US" sz="1200" dirty="0"/>
+              <a:t>  Transaction : BEGIN → 3 modifications → ROLLBACK → verifier</a:t>
+            </a:r>
+            <a:endParaRPr lang="en-US" sz="1100" dirty="0"/>
+          </a:p>
+        </p:txBody>
+      </p:sp>
+      <p:sp>
+        <p:nvSpPr>
+          <p:cNvPr id="25" name="Shape 23"/>
+          <p:cNvSpPr/>
+          <p:nvPr/>
+        </p:nvSpPr>
+        <p:spPr>
+          <a:xfrm>
+            <a:off x="457200" y="4105656"/>
+            <a:ext cx="8229600" cy="448056"/>
+          </a:xfrm>
+          <a:prstGeom prst="rect">
+            <a:avLst/>
+          </a:prstGeom>
+          <a:solidFill>
+            <a:srgbClr val="E3F2FD"/>
+          </a:solidFill>
+          <a:ln/>
+        </p:spPr>
+      </p:sp>
+      <p:sp>
+        <p:nvSpPr>
+          <p:cNvPr id="26" name="Shape 24"/>
+          <p:cNvSpPr/>
+          <p:nvPr/>
+        </p:nvSpPr>
+        <p:spPr>
+          <a:xfrm>
+            <a:off x="457200" y="4105656"/>
+            <a:ext cx="45720" cy="448056"/>
+          </a:xfrm>
+          <a:prstGeom prst="rect">
+            <a:avLst/>
+          </a:prstGeom>
+          <a:solidFill>
+            <a:srgbClr val="1565C0"/>
+          </a:solidFill>
+          <a:ln/>
+        </p:spPr>
+      </p:sp>
+      <p:sp>
+        <p:nvSpPr>
+          <p:cNvPr id="27" name="Text 25"/>
+          <p:cNvSpPr/>
+          <p:nvPr/>
+        </p:nvSpPr>
+        <p:spPr>
+          <a:xfrm>
+            <a:off x="640080" y="4105656"/>
+            <a:ext cx="7863840" cy="448056"/>
+          </a:xfrm>
+          <a:prstGeom prst="rect">
+            <a:avLst/>
+          </a:prstGeom>
+          <a:noFill/>
+          <a:ln/>
+        </p:spPr>
+        <p:txBody>
+          <a:bodyPr wrap="square" lIns="0" tIns="0" rIns="0" bIns="0" rtlCol="0" anchor="ctr"/>
+          <a:lstStyle/>
+          <a:p>
+            <a:pPr indent="0" marL="0">
+              <a:buNone/>
+            </a:pPr>
+            <a:r>
+              <a:rPr lang="en-US" sz="1100" dirty="0">
+                <a:solidFill>
+                  <a:srgbClr val="1A1A2E"/>
+                </a:solidFill>
+                <a:latin typeface="Calibri" pitchFamily="34" charset="0"/>
+                <a:ea typeface="Calibri" pitchFamily="34" charset="-122"/>
+                <a:cs typeface="Calibri" pitchFamily="34" charset="-120"/>
+              </a:rPr>
+              <a:t>DEFI : utiliser SAVEPOINT pour un rollback partiel</a:t>
+            </a:r>
+            <a:endParaRPr lang="en-US" sz="1100" dirty="0"/>
           </a:p>
         </p:txBody>
       </p:sp>
@@ -5813,8 +5928,8 @@
         </p:nvSpPr>
         <p:spPr>
           <a:xfrm>
-            <a:off x="3840480" y="457200"/>
-            <a:ext cx="1463040" cy="1097280"/>
+            <a:off x="457200" y="1828800"/>
+            <a:ext cx="8229600" cy="548640"/>
           </a:xfrm>
           <a:prstGeom prst="rect">
             <a:avLst/>
@@ -5830,43 +5945,7 @@
               <a:buNone/>
             </a:pPr>
             <a:r>
-              <a:rPr lang="en-US" sz="6000" dirty="0">
-                <a:solidFill>
-                  <a:srgbClr val="000000"/>
-                </a:solidFill>
-              </a:rPr>
-              <a:t>🎮</a:t>
-            </a:r>
-            <a:endParaRPr lang="en-US" sz="6000" dirty="0"/>
-          </a:p>
-        </p:txBody>
-      </p:sp>
-      <p:sp>
-        <p:nvSpPr>
-          <p:cNvPr id="3" name="Text 1"/>
-          <p:cNvSpPr/>
-          <p:nvPr/>
-        </p:nvSpPr>
-        <p:spPr>
-          <a:xfrm>
-            <a:off x="457200" y="1645920"/>
-            <a:ext cx="8229600" cy="548640"/>
-          </a:xfrm>
-          <a:prstGeom prst="rect">
-            <a:avLst/>
-          </a:prstGeom>
-          <a:noFill/>
-          <a:ln/>
-        </p:spPr>
-        <p:txBody>
-          <a:bodyPr wrap="square" lIns="0" tIns="0" rIns="0" bIns="0" rtlCol="0" anchor="ctr"/>
-          <a:lstStyle/>
-          <a:p>
-            <a:pPr algn="ctr" indent="0" marL="0">
-              <a:buNone/>
-            </a:pPr>
-            <a:r>
-              <a:rPr lang="en-US" sz="2600" b="1" dirty="0">
+              <a:rPr lang="en-US" sz="2200" b="1" dirty="0">
                 <a:solidFill>
                   <a:srgbClr val="FFFFFF"/>
                 </a:solidFill>
@@ -5874,22 +5953,22 @@
                 <a:ea typeface="Trebuchet MS" pitchFamily="34" charset="-122"/>
                 <a:cs typeface="Trebuchet MS" pitchFamily="34" charset="-120"/>
               </a:rPr>
-              <a:t>Mini-jeu : Le Démineur SQL</a:t>
-            </a:r>
-            <a:endParaRPr lang="en-US" sz="2600" dirty="0"/>
-          </a:p>
-        </p:txBody>
-      </p:sp>
-      <p:sp>
-        <p:nvSpPr>
-          <p:cNvPr id="4" name="Text 2"/>
-          <p:cNvSpPr/>
-          <p:nvPr/>
-        </p:nvSpPr>
-        <p:spPr>
-          <a:xfrm>
-            <a:off x="1371600" y="2286000"/>
-            <a:ext cx="6400800" cy="731520"/>
+              <a:t>Mini-jeu : Le Demineur SQL</a:t>
+            </a:r>
+            <a:endParaRPr lang="en-US" sz="2200" dirty="0"/>
+          </a:p>
+        </p:txBody>
+      </p:sp>
+      <p:sp>
+        <p:nvSpPr>
+          <p:cNvPr id="3" name="Text 1"/>
+          <p:cNvSpPr/>
+          <p:nvPr/>
+        </p:nvSpPr>
+        <p:spPr>
+          <a:xfrm>
+            <a:off x="1371600" y="2468880"/>
+            <a:ext cx="6400800" cy="457200"/>
           </a:xfrm>
           <a:prstGeom prst="rect">
             <a:avLst/>
@@ -5905,7 +5984,7 @@
               <a:buNone/>
             </a:pPr>
             <a:r>
-              <a:rPr lang="en-US" sz="1400" dirty="0">
+              <a:rPr lang="en-US" sz="1300" dirty="0">
                 <a:solidFill>
                   <a:srgbClr val="CCCCCC"/>
                 </a:solidFill>
@@ -5913,68 +5992,9 @@
                 <a:ea typeface="Calibri" pitchFamily="34" charset="-122"/>
                 <a:cs typeface="Calibri" pitchFamily="34" charset="-120"/>
               </a:rPr>
-              <a:t>DELETE sans WHERE = BOOM ! Apprenez la prudence.</a:t>
-            </a:r>
-            <a:endParaRPr lang="en-US" sz="1400" dirty="0"/>
-          </a:p>
-        </p:txBody>
-      </p:sp>
-      <p:sp>
-        <p:nvSpPr>
-          <p:cNvPr id="5" name="Shape 3"/>
-          <p:cNvSpPr/>
-          <p:nvPr/>
-        </p:nvSpPr>
-        <p:spPr>
-          <a:xfrm>
-            <a:off x="2286000" y="3291840"/>
-            <a:ext cx="4572000" cy="548640"/>
-          </a:xfrm>
-          <a:prstGeom prst="rect">
-            <a:avLst/>
-          </a:prstGeom>
-          <a:solidFill>
-            <a:srgbClr val="FF6F00"/>
-          </a:solidFill>
-          <a:ln/>
-        </p:spPr>
-      </p:sp>
-      <p:sp>
-        <p:nvSpPr>
-          <p:cNvPr id="6" name="Text 4"/>
-          <p:cNvSpPr/>
-          <p:nvPr/>
-        </p:nvSpPr>
-        <p:spPr>
-          <a:xfrm>
-            <a:off x="2286000" y="3291840"/>
-            <a:ext cx="4572000" cy="548640"/>
-          </a:xfrm>
-          <a:prstGeom prst="rect">
-            <a:avLst/>
-          </a:prstGeom>
-          <a:noFill/>
-          <a:ln/>
-        </p:spPr>
-        <p:txBody>
-          <a:bodyPr wrap="square" lIns="0" tIns="0" rIns="0" bIns="0" rtlCol="0" anchor="ctr"/>
-          <a:lstStyle/>
-          <a:p>
-            <a:pPr algn="ctr" indent="0" marL="0">
-              <a:buNone/>
-            </a:pPr>
-            <a:r>
-              <a:rPr lang="en-US" sz="1800" b="1" dirty="0">
-                <a:solidFill>
-                  <a:srgbClr val="FFFFFF"/>
-                </a:solidFill>
-                <a:latin typeface="Trebuchet MS" pitchFamily="34" charset="0"/>
-                <a:ea typeface="Trebuchet MS" pitchFamily="34" charset="-122"/>
-                <a:cs typeface="Trebuchet MS" pitchFamily="34" charset="-120"/>
-              </a:rPr>
-              <a:t>▶  Lancer le jeu</a:t>
-            </a:r>
-            <a:endParaRPr lang="en-US" sz="1800" dirty="0"/>
+              <a:t>DELETE sans WHERE = BOOM !</a:t>
+            </a:r>
+            <a:endParaRPr lang="en-US" sz="1300" dirty="0"/>
           </a:p>
         </p:txBody>
       </p:sp>
@@ -6019,7 +6039,7 @@
         <p:spPr>
           <a:xfrm>
             <a:off x="457200" y="137160"/>
-            <a:ext cx="5486400" cy="411480"/>
+            <a:ext cx="5486400" cy="365760"/>
           </a:xfrm>
           <a:prstGeom prst="rect">
             <a:avLst/>
@@ -6035,7 +6055,7 @@
               <a:buNone/>
             </a:pPr>
             <a:r>
-              <a:rPr lang="en-US" sz="1800" b="1" dirty="0">
+              <a:rPr lang="en-US" sz="1600" b="1" dirty="0">
                 <a:solidFill>
                   <a:srgbClr val="0D47A1"/>
                 </a:solidFill>
@@ -6043,9 +6063,9 @@
                 <a:ea typeface="Trebuchet MS" pitchFamily="34" charset="-122"/>
                 <a:cs typeface="Trebuchet MS" pitchFamily="34" charset="-120"/>
               </a:rPr>
-              <a:t>📋 Mémo Module 11</a:t>
-            </a:r>
-            <a:endParaRPr lang="en-US" sz="1800" dirty="0"/>
+              <a:t>Memo Module 11</a:t>
+            </a:r>
+            <a:endParaRPr lang="en-US" sz="1600" dirty="0"/>
           </a:p>
         </p:txBody>
       </p:sp>
@@ -6057,14 +6077,14 @@
         </p:nvSpPr>
         <p:spPr>
           <a:xfrm>
-            <a:off x="457200" y="548640"/>
-            <a:ext cx="8229600" cy="274320"/>
-          </a:xfrm>
-          <a:prstGeom prst="rect">
-            <a:avLst/>
-          </a:prstGeom>
-          <a:solidFill>
-            <a:srgbClr val="FFF3E0"/>
+            <a:off x="457200" y="594360"/>
+            <a:ext cx="2286000" cy="411480"/>
+          </a:xfrm>
+          <a:prstGeom prst="rect">
+            <a:avLst/>
+          </a:prstGeom>
+          <a:solidFill>
+            <a:srgbClr val="E3F2FD"/>
           </a:solidFill>
           <a:ln/>
         </p:spPr>
@@ -6077,67 +6097,8 @@
         </p:nvSpPr>
         <p:spPr>
           <a:xfrm>
-            <a:off x="640080" y="548640"/>
-            <a:ext cx="7772400" cy="274320"/>
-          </a:xfrm>
-          <a:prstGeom prst="rect">
-            <a:avLst/>
-          </a:prstGeom>
-          <a:noFill/>
-          <a:ln/>
-        </p:spPr>
-        <p:txBody>
-          <a:bodyPr wrap="square" lIns="0" tIns="0" rIns="0" bIns="0" rtlCol="0" anchor="ctr"/>
-          <a:lstStyle/>
-          <a:p>
-            <a:pPr indent="0" marL="0">
-              <a:buNone/>
-            </a:pPr>
-            <a:r>
-              <a:rPr lang="en-US" sz="900" b="1" dirty="0">
-                <a:solidFill>
-                  <a:srgbClr val="E65100"/>
-                </a:solidFill>
-                <a:latin typeface="Calibri" pitchFamily="34" charset="0"/>
-                <a:ea typeface="Calibri" pitchFamily="34" charset="-122"/>
-                <a:cs typeface="Calibri" pitchFamily="34" charset="-120"/>
-              </a:rPr>
-              <a:t>🔒 Déblocable après complétion</a:t>
-            </a:r>
-            <a:endParaRPr lang="en-US" sz="900" dirty="0"/>
-          </a:p>
-        </p:txBody>
-      </p:sp>
-      <p:sp>
-        <p:nvSpPr>
-          <p:cNvPr id="5" name="Shape 3"/>
-          <p:cNvSpPr/>
-          <p:nvPr/>
-        </p:nvSpPr>
-        <p:spPr>
-          <a:xfrm>
-            <a:off x="457200" y="960120"/>
-            <a:ext cx="2286000" cy="475488"/>
-          </a:xfrm>
-          <a:prstGeom prst="rect">
-            <a:avLst/>
-          </a:prstGeom>
-          <a:solidFill>
-            <a:srgbClr val="E3F2FD"/>
-          </a:solidFill>
-          <a:ln/>
-        </p:spPr>
-      </p:sp>
-      <p:sp>
-        <p:nvSpPr>
-          <p:cNvPr id="6" name="Text 4"/>
-          <p:cNvSpPr/>
-          <p:nvPr/>
-        </p:nvSpPr>
-        <p:spPr>
-          <a:xfrm>
-            <a:off x="548640" y="960120"/>
-            <a:ext cx="2103120" cy="475488"/>
+            <a:off x="548640" y="594360"/>
+            <a:ext cx="2103120" cy="411480"/>
           </a:xfrm>
           <a:prstGeom prst="rect">
             <a:avLst/>
@@ -6169,14 +6130,14 @@
       </p:sp>
       <p:sp>
         <p:nvSpPr>
-          <p:cNvPr id="7" name="Shape 5"/>
-          <p:cNvSpPr/>
-          <p:nvPr/>
-        </p:nvSpPr>
-        <p:spPr>
-          <a:xfrm>
-            <a:off x="2743200" y="960120"/>
-            <a:ext cx="5943600" cy="475488"/>
+          <p:cNvPr id="5" name="Shape 3"/>
+          <p:cNvSpPr/>
+          <p:nvPr/>
+        </p:nvSpPr>
+        <p:spPr>
+          <a:xfrm>
+            <a:off x="2743200" y="594360"/>
+            <a:ext cx="5943600" cy="411480"/>
           </a:xfrm>
           <a:prstGeom prst="rect">
             <a:avLst/>
@@ -6189,14 +6150,14 @@
       </p:sp>
       <p:sp>
         <p:nvSpPr>
-          <p:cNvPr id="8" name="Text 6"/>
-          <p:cNvSpPr/>
-          <p:nvPr/>
-        </p:nvSpPr>
-        <p:spPr>
-          <a:xfrm>
-            <a:off x="2834640" y="960120"/>
-            <a:ext cx="5760720" cy="475488"/>
+          <p:cNvPr id="6" name="Text 4"/>
+          <p:cNvSpPr/>
+          <p:nvPr/>
+        </p:nvSpPr>
+        <p:spPr>
+          <a:xfrm>
+            <a:off x="2834640" y="594360"/>
+            <a:ext cx="5760720" cy="411480"/>
           </a:xfrm>
           <a:prstGeom prst="rect">
             <a:avLst/>
@@ -6220,7 +6181,7 @@
                 <a:ea typeface="Calibri" pitchFamily="34" charset="-122"/>
                 <a:cs typeface="Calibri" pitchFamily="34" charset="-120"/>
               </a:rPr>
-              <a:t>Nommer les colonnes, respecter l'ordre FK, INSERT multiple</a:t>
+              <a:t>Nommer colonnes, respecter ordre FK, INSERT multiple</a:t>
             </a:r>
             <a:endParaRPr lang="en-US" sz="900" dirty="0"/>
           </a:p>
@@ -6228,14 +6189,14 @@
       </p:sp>
       <p:sp>
         <p:nvSpPr>
-          <p:cNvPr id="9" name="Shape 7"/>
-          <p:cNvSpPr/>
-          <p:nvPr/>
-        </p:nvSpPr>
-        <p:spPr>
-          <a:xfrm>
-            <a:off x="457200" y="1463040"/>
-            <a:ext cx="2286000" cy="475488"/>
+          <p:cNvPr id="7" name="Shape 5"/>
+          <p:cNvSpPr/>
+          <p:nvPr/>
+        </p:nvSpPr>
+        <p:spPr>
+          <a:xfrm>
+            <a:off x="457200" y="1033272"/>
+            <a:ext cx="2286000" cy="411480"/>
           </a:xfrm>
           <a:prstGeom prst="rect">
             <a:avLst/>
@@ -6248,14 +6209,14 @@
       </p:sp>
       <p:sp>
         <p:nvSpPr>
-          <p:cNvPr id="10" name="Text 8"/>
-          <p:cNvSpPr/>
-          <p:nvPr/>
-        </p:nvSpPr>
-        <p:spPr>
-          <a:xfrm>
-            <a:off x="548640" y="1463040"/>
-            <a:ext cx="2103120" cy="475488"/>
+          <p:cNvPr id="8" name="Text 6"/>
+          <p:cNvSpPr/>
+          <p:nvPr/>
+        </p:nvSpPr>
+        <p:spPr>
+          <a:xfrm>
+            <a:off x="548640" y="1033272"/>
+            <a:ext cx="2103120" cy="411480"/>
           </a:xfrm>
           <a:prstGeom prst="rect">
             <a:avLst/>
@@ -6287,14 +6248,14 @@
       </p:sp>
       <p:sp>
         <p:nvSpPr>
-          <p:cNvPr id="11" name="Shape 9"/>
-          <p:cNvSpPr/>
-          <p:nvPr/>
-        </p:nvSpPr>
-        <p:spPr>
-          <a:xfrm>
-            <a:off x="2743200" y="1463040"/>
-            <a:ext cx="5943600" cy="475488"/>
+          <p:cNvPr id="9" name="Shape 7"/>
+          <p:cNvSpPr/>
+          <p:nvPr/>
+        </p:nvSpPr>
+        <p:spPr>
+          <a:xfrm>
+            <a:off x="2743200" y="1033272"/>
+            <a:ext cx="5943600" cy="411480"/>
           </a:xfrm>
           <a:prstGeom prst="rect">
             <a:avLst/>
@@ -6307,14 +6268,14 @@
       </p:sp>
       <p:sp>
         <p:nvSpPr>
-          <p:cNvPr id="12" name="Text 10"/>
-          <p:cNvSpPr/>
-          <p:nvPr/>
-        </p:nvSpPr>
-        <p:spPr>
-          <a:xfrm>
-            <a:off x="2834640" y="1463040"/>
-            <a:ext cx="5760720" cy="475488"/>
+          <p:cNvPr id="10" name="Text 8"/>
+          <p:cNvSpPr/>
+          <p:nvPr/>
+        </p:nvSpPr>
+        <p:spPr>
+          <a:xfrm>
+            <a:off x="2834640" y="1033272"/>
+            <a:ext cx="5760720" cy="411480"/>
           </a:xfrm>
           <a:prstGeom prst="rect">
             <a:avLst/>
@@ -6338,7 +6299,7 @@
                 <a:ea typeface="Calibri" pitchFamily="34" charset="-122"/>
                 <a:cs typeface="Calibri" pitchFamily="34" charset="-120"/>
               </a:rPr>
-              <a:t>TOUJOURS avec WHERE — SELECT avant pour vérifier</a:t>
+              <a:t>TOUJOURS avec WHERE — SELECT avant !</a:t>
             </a:r>
             <a:endParaRPr lang="en-US" sz="900" dirty="0"/>
           </a:p>
@@ -6346,14 +6307,14 @@
       </p:sp>
       <p:sp>
         <p:nvSpPr>
-          <p:cNvPr id="13" name="Shape 11"/>
-          <p:cNvSpPr/>
-          <p:nvPr/>
-        </p:nvSpPr>
-        <p:spPr>
-          <a:xfrm>
-            <a:off x="457200" y="1965960"/>
-            <a:ext cx="2286000" cy="475488"/>
+          <p:cNvPr id="11" name="Shape 9"/>
+          <p:cNvSpPr/>
+          <p:nvPr/>
+        </p:nvSpPr>
+        <p:spPr>
+          <a:xfrm>
+            <a:off x="457200" y="1472184"/>
+            <a:ext cx="2286000" cy="411480"/>
           </a:xfrm>
           <a:prstGeom prst="rect">
             <a:avLst/>
@@ -6366,14 +6327,14 @@
       </p:sp>
       <p:sp>
         <p:nvSpPr>
-          <p:cNvPr id="14" name="Text 12"/>
-          <p:cNvSpPr/>
-          <p:nvPr/>
-        </p:nvSpPr>
-        <p:spPr>
-          <a:xfrm>
-            <a:off x="548640" y="1965960"/>
-            <a:ext cx="2103120" cy="475488"/>
+          <p:cNvPr id="12" name="Text 10"/>
+          <p:cNvSpPr/>
+          <p:nvPr/>
+        </p:nvSpPr>
+        <p:spPr>
+          <a:xfrm>
+            <a:off x="548640" y="1472184"/>
+            <a:ext cx="2103120" cy="411480"/>
           </a:xfrm>
           <a:prstGeom prst="rect">
             <a:avLst/>
@@ -6405,14 +6366,14 @@
       </p:sp>
       <p:sp>
         <p:nvSpPr>
-          <p:cNvPr id="15" name="Shape 13"/>
-          <p:cNvSpPr/>
-          <p:nvPr/>
-        </p:nvSpPr>
-        <p:spPr>
-          <a:xfrm>
-            <a:off x="2743200" y="1965960"/>
-            <a:ext cx="5943600" cy="475488"/>
+          <p:cNvPr id="13" name="Shape 11"/>
+          <p:cNvSpPr/>
+          <p:nvPr/>
+        </p:nvSpPr>
+        <p:spPr>
+          <a:xfrm>
+            <a:off x="2743200" y="1472184"/>
+            <a:ext cx="5943600" cy="411480"/>
           </a:xfrm>
           <a:prstGeom prst="rect">
             <a:avLst/>
@@ -6425,14 +6386,14 @@
       </p:sp>
       <p:sp>
         <p:nvSpPr>
-          <p:cNvPr id="16" name="Text 14"/>
-          <p:cNvSpPr/>
-          <p:nvPr/>
-        </p:nvSpPr>
-        <p:spPr>
-          <a:xfrm>
-            <a:off x="2834640" y="1965960"/>
-            <a:ext cx="5760720" cy="475488"/>
+          <p:cNvPr id="14" name="Text 12"/>
+          <p:cNvSpPr/>
+          <p:nvPr/>
+        </p:nvSpPr>
+        <p:spPr>
+          <a:xfrm>
+            <a:off x="2834640" y="1472184"/>
+            <a:ext cx="5760720" cy="411480"/>
           </a:xfrm>
           <a:prstGeom prst="rect">
             <a:avLst/>
@@ -6456,7 +6417,7 @@
                 <a:ea typeface="Calibri" pitchFamily="34" charset="-122"/>
                 <a:cs typeface="Calibri" pitchFamily="34" charset="-120"/>
               </a:rPr>
-              <a:t>TOUJOURS avec WHERE — SELECT COUNT avant pour vérifier</a:t>
+              <a:t>TOUJOURS avec WHERE — SELECT COUNT avant !</a:t>
             </a:r>
             <a:endParaRPr lang="en-US" sz="900" dirty="0"/>
           </a:p>
@@ -6464,14 +6425,14 @@
       </p:sp>
       <p:sp>
         <p:nvSpPr>
-          <p:cNvPr id="17" name="Shape 15"/>
-          <p:cNvSpPr/>
-          <p:nvPr/>
-        </p:nvSpPr>
-        <p:spPr>
-          <a:xfrm>
-            <a:off x="457200" y="2468880"/>
-            <a:ext cx="2286000" cy="475488"/>
+          <p:cNvPr id="15" name="Shape 13"/>
+          <p:cNvSpPr/>
+          <p:nvPr/>
+        </p:nvSpPr>
+        <p:spPr>
+          <a:xfrm>
+            <a:off x="457200" y="1911096"/>
+            <a:ext cx="2286000" cy="411480"/>
           </a:xfrm>
           <a:prstGeom prst="rect">
             <a:avLst/>
@@ -6484,14 +6445,14 @@
       </p:sp>
       <p:sp>
         <p:nvSpPr>
-          <p:cNvPr id="18" name="Text 16"/>
-          <p:cNvSpPr/>
-          <p:nvPr/>
-        </p:nvSpPr>
-        <p:spPr>
-          <a:xfrm>
-            <a:off x="548640" y="2468880"/>
-            <a:ext cx="2103120" cy="475488"/>
+          <p:cNvPr id="16" name="Text 14"/>
+          <p:cNvSpPr/>
+          <p:nvPr/>
+        </p:nvSpPr>
+        <p:spPr>
+          <a:xfrm>
+            <a:off x="548640" y="1911096"/>
+            <a:ext cx="2103120" cy="411480"/>
           </a:xfrm>
           <a:prstGeom prst="rect">
             <a:avLst/>
@@ -6523,14 +6484,14 @@
       </p:sp>
       <p:sp>
         <p:nvSpPr>
-          <p:cNvPr id="19" name="Shape 17"/>
-          <p:cNvSpPr/>
-          <p:nvPr/>
-        </p:nvSpPr>
-        <p:spPr>
-          <a:xfrm>
-            <a:off x="2743200" y="2468880"/>
-            <a:ext cx="5943600" cy="475488"/>
+          <p:cNvPr id="17" name="Shape 15"/>
+          <p:cNvSpPr/>
+          <p:nvPr/>
+        </p:nvSpPr>
+        <p:spPr>
+          <a:xfrm>
+            <a:off x="2743200" y="1911096"/>
+            <a:ext cx="5943600" cy="411480"/>
           </a:xfrm>
           <a:prstGeom prst="rect">
             <a:avLst/>
@@ -6543,14 +6504,14 @@
       </p:sp>
       <p:sp>
         <p:nvSpPr>
-          <p:cNvPr id="20" name="Text 18"/>
-          <p:cNvSpPr/>
-          <p:nvPr/>
-        </p:nvSpPr>
-        <p:spPr>
-          <a:xfrm>
-            <a:off x="2834640" y="2468880"/>
-            <a:ext cx="5760720" cy="475488"/>
+          <p:cNvPr id="18" name="Text 16"/>
+          <p:cNvSpPr/>
+          <p:nvPr/>
+        </p:nvSpPr>
+        <p:spPr>
+          <a:xfrm>
+            <a:off x="2834640" y="1911096"/>
+            <a:ext cx="5760720" cy="411480"/>
           </a:xfrm>
           <a:prstGeom prst="rect">
             <a:avLst/>
@@ -6582,14 +6543,14 @@
       </p:sp>
       <p:sp>
         <p:nvSpPr>
-          <p:cNvPr id="21" name="Shape 19"/>
-          <p:cNvSpPr/>
-          <p:nvPr/>
-        </p:nvSpPr>
-        <p:spPr>
-          <a:xfrm>
-            <a:off x="457200" y="2971800"/>
-            <a:ext cx="2286000" cy="475488"/>
+          <p:cNvPr id="19" name="Shape 17"/>
+          <p:cNvSpPr/>
+          <p:nvPr/>
+        </p:nvSpPr>
+        <p:spPr>
+          <a:xfrm>
+            <a:off x="457200" y="2350008"/>
+            <a:ext cx="2286000" cy="411480"/>
           </a:xfrm>
           <a:prstGeom prst="rect">
             <a:avLst/>
@@ -6602,14 +6563,14 @@
       </p:sp>
       <p:sp>
         <p:nvSpPr>
-          <p:cNvPr id="22" name="Text 20"/>
-          <p:cNvSpPr/>
-          <p:nvPr/>
-        </p:nvSpPr>
-        <p:spPr>
-          <a:xfrm>
-            <a:off x="548640" y="2971800"/>
-            <a:ext cx="2103120" cy="475488"/>
+          <p:cNvPr id="20" name="Text 18"/>
+          <p:cNvSpPr/>
+          <p:nvPr/>
+        </p:nvSpPr>
+        <p:spPr>
+          <a:xfrm>
+            <a:off x="548640" y="2350008"/>
+            <a:ext cx="2103120" cy="411480"/>
           </a:xfrm>
           <a:prstGeom prst="rect">
             <a:avLst/>
@@ -6641,14 +6602,14 @@
       </p:sp>
       <p:sp>
         <p:nvSpPr>
-          <p:cNvPr id="23" name="Shape 21"/>
-          <p:cNvSpPr/>
-          <p:nvPr/>
-        </p:nvSpPr>
-        <p:spPr>
-          <a:xfrm>
-            <a:off x="2743200" y="2971800"/>
-            <a:ext cx="5943600" cy="475488"/>
+          <p:cNvPr id="21" name="Shape 19"/>
+          <p:cNvSpPr/>
+          <p:nvPr/>
+        </p:nvSpPr>
+        <p:spPr>
+          <a:xfrm>
+            <a:off x="2743200" y="2350008"/>
+            <a:ext cx="5943600" cy="411480"/>
           </a:xfrm>
           <a:prstGeom prst="rect">
             <a:avLst/>
@@ -6661,14 +6622,14 @@
       </p:sp>
       <p:sp>
         <p:nvSpPr>
-          <p:cNvPr id="24" name="Text 22"/>
-          <p:cNvSpPr/>
-          <p:nvPr/>
-        </p:nvSpPr>
-        <p:spPr>
-          <a:xfrm>
-            <a:off x="2834640" y="2971800"/>
-            <a:ext cx="5760720" cy="475488"/>
+          <p:cNvPr id="22" name="Text 20"/>
+          <p:cNvSpPr/>
+          <p:nvPr/>
+        </p:nvSpPr>
+        <p:spPr>
+          <a:xfrm>
+            <a:off x="2834640" y="2350008"/>
+            <a:ext cx="5760720" cy="411480"/>
           </a:xfrm>
           <a:prstGeom prst="rect">
             <a:avLst/>
@@ -6692,7 +6653,7 @@
                 <a:ea typeface="Calibri" pitchFamily="34" charset="-122"/>
                 <a:cs typeface="Calibri" pitchFamily="34" charset="-120"/>
               </a:rPr>
-              <a:t>Valider les modifications définitivement</a:t>
+              <a:t>Valider definitivement</a:t>
             </a:r>
             <a:endParaRPr lang="en-US" sz="900" dirty="0"/>
           </a:p>
@@ -6700,14 +6661,14 @@
       </p:sp>
       <p:sp>
         <p:nvSpPr>
-          <p:cNvPr id="25" name="Shape 23"/>
-          <p:cNvSpPr/>
-          <p:nvPr/>
-        </p:nvSpPr>
-        <p:spPr>
-          <a:xfrm>
-            <a:off x="457200" y="3474720"/>
-            <a:ext cx="2286000" cy="475488"/>
+          <p:cNvPr id="23" name="Shape 21"/>
+          <p:cNvSpPr/>
+          <p:nvPr/>
+        </p:nvSpPr>
+        <p:spPr>
+          <a:xfrm>
+            <a:off x="457200" y="2788920"/>
+            <a:ext cx="2286000" cy="411480"/>
           </a:xfrm>
           <a:prstGeom prst="rect">
             <a:avLst/>
@@ -6720,14 +6681,14 @@
       </p:sp>
       <p:sp>
         <p:nvSpPr>
-          <p:cNvPr id="26" name="Text 24"/>
-          <p:cNvSpPr/>
-          <p:nvPr/>
-        </p:nvSpPr>
-        <p:spPr>
-          <a:xfrm>
-            <a:off x="548640" y="3474720"/>
-            <a:ext cx="2103120" cy="475488"/>
+          <p:cNvPr id="24" name="Text 22"/>
+          <p:cNvSpPr/>
+          <p:nvPr/>
+        </p:nvSpPr>
+        <p:spPr>
+          <a:xfrm>
+            <a:off x="548640" y="2788920"/>
+            <a:ext cx="2103120" cy="411480"/>
           </a:xfrm>
           <a:prstGeom prst="rect">
             <a:avLst/>
@@ -6759,14 +6720,14 @@
       </p:sp>
       <p:sp>
         <p:nvSpPr>
-          <p:cNvPr id="27" name="Shape 25"/>
-          <p:cNvSpPr/>
-          <p:nvPr/>
-        </p:nvSpPr>
-        <p:spPr>
-          <a:xfrm>
-            <a:off x="2743200" y="3474720"/>
-            <a:ext cx="5943600" cy="475488"/>
+          <p:cNvPr id="25" name="Shape 23"/>
+          <p:cNvSpPr/>
+          <p:nvPr/>
+        </p:nvSpPr>
+        <p:spPr>
+          <a:xfrm>
+            <a:off x="2743200" y="2788920"/>
+            <a:ext cx="5943600" cy="411480"/>
           </a:xfrm>
           <a:prstGeom prst="rect">
             <a:avLst/>
@@ -6779,14 +6740,14 @@
       </p:sp>
       <p:sp>
         <p:nvSpPr>
-          <p:cNvPr id="28" name="Text 26"/>
-          <p:cNvSpPr/>
-          <p:nvPr/>
-        </p:nvSpPr>
-        <p:spPr>
-          <a:xfrm>
-            <a:off x="2834640" y="3474720"/>
-            <a:ext cx="5760720" cy="475488"/>
+          <p:cNvPr id="26" name="Text 24"/>
+          <p:cNvSpPr/>
+          <p:nvPr/>
+        </p:nvSpPr>
+        <p:spPr>
+          <a:xfrm>
+            <a:off x="2834640" y="2788920"/>
+            <a:ext cx="5760720" cy="411480"/>
           </a:xfrm>
           <a:prstGeom prst="rect">
             <a:avLst/>
@@ -6818,14 +6779,14 @@
       </p:sp>
       <p:sp>
         <p:nvSpPr>
-          <p:cNvPr id="29" name="Shape 27"/>
-          <p:cNvSpPr/>
-          <p:nvPr/>
-        </p:nvSpPr>
-        <p:spPr>
-          <a:xfrm>
-            <a:off x="457200" y="3977640"/>
-            <a:ext cx="2286000" cy="475488"/>
+          <p:cNvPr id="27" name="Shape 25"/>
+          <p:cNvSpPr/>
+          <p:nvPr/>
+        </p:nvSpPr>
+        <p:spPr>
+          <a:xfrm>
+            <a:off x="457200" y="3227832"/>
+            <a:ext cx="2286000" cy="411480"/>
           </a:xfrm>
           <a:prstGeom prst="rect">
             <a:avLst/>
@@ -6838,14 +6799,14 @@
       </p:sp>
       <p:sp>
         <p:nvSpPr>
-          <p:cNvPr id="30" name="Text 28"/>
-          <p:cNvSpPr/>
-          <p:nvPr/>
-        </p:nvSpPr>
-        <p:spPr>
-          <a:xfrm>
-            <a:off x="548640" y="3977640"/>
-            <a:ext cx="2103120" cy="475488"/>
+          <p:cNvPr id="28" name="Text 26"/>
+          <p:cNvSpPr/>
+          <p:nvPr/>
+        </p:nvSpPr>
+        <p:spPr>
+          <a:xfrm>
+            <a:off x="548640" y="3227832"/>
+            <a:ext cx="2103120" cy="411480"/>
           </a:xfrm>
           <a:prstGeom prst="rect">
             <a:avLst/>
@@ -6877,14 +6838,14 @@
       </p:sp>
       <p:sp>
         <p:nvSpPr>
-          <p:cNvPr id="31" name="Shape 29"/>
-          <p:cNvSpPr/>
-          <p:nvPr/>
-        </p:nvSpPr>
-        <p:spPr>
-          <a:xfrm>
-            <a:off x="2743200" y="3977640"/>
-            <a:ext cx="5943600" cy="475488"/>
+          <p:cNvPr id="29" name="Shape 27"/>
+          <p:cNvSpPr/>
+          <p:nvPr/>
+        </p:nvSpPr>
+        <p:spPr>
+          <a:xfrm>
+            <a:off x="2743200" y="3227832"/>
+            <a:ext cx="5943600" cy="411480"/>
           </a:xfrm>
           <a:prstGeom prst="rect">
             <a:avLst/>
@@ -6897,14 +6858,14 @@
       </p:sp>
       <p:sp>
         <p:nvSpPr>
-          <p:cNvPr id="32" name="Text 30"/>
-          <p:cNvSpPr/>
-          <p:nvPr/>
-        </p:nvSpPr>
-        <p:spPr>
-          <a:xfrm>
-            <a:off x="2834640" y="3977640"/>
-            <a:ext cx="5760720" cy="475488"/>
+          <p:cNvPr id="30" name="Text 28"/>
+          <p:cNvSpPr/>
+          <p:nvPr/>
+        </p:nvSpPr>
+        <p:spPr>
+          <a:xfrm>
+            <a:off x="2834640" y="3227832"/>
+            <a:ext cx="5760720" cy="411480"/>
           </a:xfrm>
           <a:prstGeom prst="rect">
             <a:avLst/>
@@ -6928,7 +6889,7 @@
                 <a:ea typeface="Calibri" pitchFamily="34" charset="-122"/>
                 <a:cs typeface="Calibri" pitchFamily="34" charset="-120"/>
               </a:rPr>
-              <a:t>Atomicité (≠1NF!), Cohérence, Isolation, Durabilité</a:t>
+              <a:t>Atomicite (≠1NF!), Coherence, Isolation, Durabilite</a:t>
             </a:r>
             <a:endParaRPr lang="en-US" sz="900" dirty="0"/>
           </a:p>
